--- a/ftp/akm.pptx
+++ b/ftp/akm.pptx
@@ -5,7 +5,7 @@
     <p:sldMasterId id="2147483659" r:id="rId1"/>
   </p:sldMasterIdLst>
   <p:notesMasterIdLst>
-    <p:notesMasterId r:id="rId12"/>
+    <p:notesMasterId r:id="rId13"/>
   </p:notesMasterIdLst>
   <p:sldIdLst>
     <p:sldId id="256" r:id="rId2"/>
@@ -15,9 +15,10 @@
     <p:sldId id="260" r:id="rId6"/>
     <p:sldId id="261" r:id="rId7"/>
     <p:sldId id="262" r:id="rId8"/>
-    <p:sldId id="263" r:id="rId9"/>
-    <p:sldId id="264" r:id="rId10"/>
-    <p:sldId id="265" r:id="rId11"/>
+    <p:sldId id="266" r:id="rId9"/>
+    <p:sldId id="263" r:id="rId10"/>
+    <p:sldId id="264" r:id="rId11"/>
+    <p:sldId id="265" r:id="rId12"/>
   </p:sldIdLst>
   <p:sldSz cx="9144000" cy="5143500" type="screen16x9"/>
   <p:notesSz cx="6858000" cy="9144000"/>
@@ -739,8 +740,8 @@
         </p:nvSpPr>
         <p:spPr>
           <a:xfrm>
-            <a:off x="381300" y="685800"/>
-            <a:ext cx="6096075" cy="3429000"/>
+            <a:off x="381000" y="685800"/>
+            <a:ext cx="6096000" cy="3429000"/>
           </a:xfrm>
           <a:custGeom>
             <a:avLst/>
@@ -843,7 +844,7 @@
         </p:nvSpPr>
         <p:spPr>
           <a:xfrm>
-            <a:off x="381300" y="685800"/>
+            <a:off x="381000" y="685800"/>
             <a:ext cx="6096000" cy="3429000"/>
           </a:xfrm>
           <a:custGeom>
@@ -1155,7 +1156,7 @@
         </p:nvSpPr>
         <p:spPr>
           <a:xfrm>
-            <a:off x="381300" y="685800"/>
+            <a:off x="381000" y="685800"/>
             <a:ext cx="6096000" cy="3429000"/>
           </a:xfrm>
           <a:custGeom>
@@ -1363,7 +1364,7 @@
         </p:nvSpPr>
         <p:spPr>
           <a:xfrm>
-            <a:off x="381300" y="685800"/>
+            <a:off x="381000" y="685800"/>
             <a:ext cx="6096000" cy="3429000"/>
           </a:xfrm>
           <a:custGeom>
@@ -6626,7 +6627,7 @@
         </p:spPr>
         <p:txBody>
           <a:bodyPr spcFirstLastPara="1" wrap="square" lIns="91425" tIns="91425" rIns="91425" bIns="91425" anchor="t" anchorCtr="0">
-            <a:normAutofit fontScale="77500" lnSpcReduction="10000"/>
+            <a:normAutofit fontScale="70000" lnSpcReduction="20000"/>
           </a:bodyPr>
           <a:lstStyle/>
           <a:p>
@@ -6678,1364 +6679,6 @@
 </file>
 
 <file path=ppt/slides/slide10.xml><?xml version="1.0" encoding="utf-8"?>
-<p:sld xmlns:a="http://schemas.openxmlformats.org/drawingml/2006/main" xmlns:r="http://schemas.openxmlformats.org/officeDocument/2006/relationships" xmlns:p="http://schemas.openxmlformats.org/presentationml/2006/main">
-  <p:cSld>
-    <p:spTree>
-      <p:nvGrpSpPr>
-        <p:cNvPr id="1" name="Shape 112"/>
-        <p:cNvGrpSpPr/>
-        <p:nvPr/>
-      </p:nvGrpSpPr>
-      <p:grpSpPr>
-        <a:xfrm>
-          <a:off x="0" y="0"/>
-          <a:ext cx="0" cy="0"/>
-          <a:chOff x="0" y="0"/>
-          <a:chExt cx="0" cy="0"/>
-        </a:xfrm>
-      </p:grpSpPr>
-      <p:sp>
-        <p:nvSpPr>
-          <p:cNvPr id="113" name="Google Shape;113;p22"/>
-          <p:cNvSpPr txBox="1">
-            <a:spLocks noGrp="1"/>
-          </p:cNvSpPr>
-          <p:nvPr>
-            <p:ph type="title"/>
-          </p:nvPr>
-        </p:nvSpPr>
-        <p:spPr>
-          <a:xfrm>
-            <a:off x="971937" y="299234"/>
-            <a:ext cx="7753500" cy="572700"/>
-          </a:xfrm>
-          <a:prstGeom prst="rect">
-            <a:avLst/>
-          </a:prstGeom>
-        </p:spPr>
-        <p:txBody>
-          <a:bodyPr spcFirstLastPara="1" wrap="square" lIns="91425" tIns="91425" rIns="91425" bIns="91425" anchor="t" anchorCtr="0">
-            <a:normAutofit fontScale="90000"/>
-          </a:bodyPr>
-          <a:lstStyle/>
-          <a:p>
-            <a:pPr marL="0" lvl="0" indent="0" algn="l" rtl="0">
-              <a:spcBef>
-                <a:spcPts val="0"/>
-              </a:spcBef>
-              <a:spcAft>
-                <a:spcPts val="0"/>
-              </a:spcAft>
-              <a:buNone/>
-            </a:pPr>
-            <a:r>
-              <a:rPr lang="cs"/>
-              <a:t>Praktická aplikace</a:t>
-            </a:r>
-            <a:endParaRPr/>
-          </a:p>
-        </p:txBody>
-      </p:sp>
-      <p:sp>
-        <p:nvSpPr>
-          <p:cNvPr id="114" name="Google Shape;114;p22"/>
-          <p:cNvSpPr txBox="1">
-            <a:spLocks noGrp="1"/>
-          </p:cNvSpPr>
-          <p:nvPr>
-            <p:ph type="body" idx="1"/>
-          </p:nvPr>
-        </p:nvSpPr>
-        <p:spPr>
-          <a:xfrm>
-            <a:off x="311700" y="1152475"/>
-            <a:ext cx="8520600" cy="3416400"/>
-          </a:xfrm>
-          <a:prstGeom prst="rect">
-            <a:avLst/>
-          </a:prstGeom>
-        </p:spPr>
-        <p:txBody>
-          <a:bodyPr spcFirstLastPara="1" wrap="square" lIns="91425" tIns="91425" rIns="91425" bIns="91425" anchor="t" anchorCtr="0">
-            <a:normAutofit/>
-          </a:bodyPr>
-          <a:lstStyle/>
-          <a:p>
-            <a:pPr marL="457200" lvl="0" indent="-342900" algn="l" rtl="0">
-              <a:spcBef>
-                <a:spcPts val="0"/>
-              </a:spcBef>
-              <a:spcAft>
-                <a:spcPts val="0"/>
-              </a:spcAft>
-              <a:buSzPts val="1800"/>
-              <a:buChar char="●"/>
-            </a:pPr>
-            <a:r>
-              <a:rPr lang="cs"/>
-              <a:t>Detekce plagiátů: najít neoprávněné kopie</a:t>
-            </a:r>
-            <a:endParaRPr/>
-          </a:p>
-          <a:p>
-            <a:pPr marL="457200" lvl="0" indent="-342900" algn="l" rtl="0">
-              <a:spcBef>
-                <a:spcPts val="0"/>
-              </a:spcBef>
-              <a:spcAft>
-                <a:spcPts val="0"/>
-              </a:spcAft>
-              <a:buSzPts val="1800"/>
-              <a:buChar char="●"/>
-            </a:pPr>
-            <a:r>
-              <a:rPr lang="cs"/>
-              <a:t>Verifikace metadat: ověření správnosti autorství v digitálních knihovnách</a:t>
-            </a:r>
-            <a:endParaRPr/>
-          </a:p>
-          <a:p>
-            <a:pPr marL="457200" lvl="0" indent="-342900" algn="l" rtl="0">
-              <a:spcBef>
-                <a:spcPts val="0"/>
-              </a:spcBef>
-              <a:spcAft>
-                <a:spcPts val="0"/>
-              </a:spcAft>
-              <a:buSzPts val="1800"/>
-              <a:buChar char="●"/>
-            </a:pPr>
-            <a:r>
-              <a:rPr lang="cs"/>
-              <a:t>Identifikace anonymních textů</a:t>
-            </a:r>
-            <a:endParaRPr/>
-          </a:p>
-        </p:txBody>
-      </p:sp>
-    </p:spTree>
-  </p:cSld>
-  <p:clrMapOvr>
-    <a:masterClrMapping/>
-  </p:clrMapOvr>
-</p:sld>
-</file>
-
-<file path=ppt/slides/slide2.xml><?xml version="1.0" encoding="utf-8"?>
-<p:sld xmlns:a="http://schemas.openxmlformats.org/drawingml/2006/main" xmlns:r="http://schemas.openxmlformats.org/officeDocument/2006/relationships" xmlns:p="http://schemas.openxmlformats.org/presentationml/2006/main">
-  <p:cSld>
-    <p:spTree>
-      <p:nvGrpSpPr>
-        <p:cNvPr id="1" name="Shape 60"/>
-        <p:cNvGrpSpPr/>
-        <p:nvPr/>
-      </p:nvGrpSpPr>
-      <p:grpSpPr>
-        <a:xfrm>
-          <a:off x="0" y="0"/>
-          <a:ext cx="0" cy="0"/>
-          <a:chOff x="0" y="0"/>
-          <a:chExt cx="0" cy="0"/>
-        </a:xfrm>
-      </p:grpSpPr>
-      <p:sp>
-        <p:nvSpPr>
-          <p:cNvPr id="61" name="Google Shape;61;p14"/>
-          <p:cNvSpPr txBox="1">
-            <a:spLocks noGrp="1"/>
-          </p:cNvSpPr>
-          <p:nvPr>
-            <p:ph type="title"/>
-          </p:nvPr>
-        </p:nvSpPr>
-        <p:spPr>
-          <a:xfrm>
-            <a:off x="971937" y="299234"/>
-            <a:ext cx="7753500" cy="572700"/>
-          </a:xfrm>
-          <a:prstGeom prst="rect">
-            <a:avLst/>
-          </a:prstGeom>
-        </p:spPr>
-        <p:txBody>
-          <a:bodyPr spcFirstLastPara="1" wrap="square" lIns="91425" tIns="91425" rIns="91425" bIns="91425" anchor="t" anchorCtr="0">
-            <a:normAutofit fontScale="90000"/>
-          </a:bodyPr>
-          <a:lstStyle/>
-          <a:p>
-            <a:pPr marL="0" lvl="0" indent="0" algn="l" rtl="0">
-              <a:spcBef>
-                <a:spcPts val="0"/>
-              </a:spcBef>
-              <a:spcAft>
-                <a:spcPts val="0"/>
-              </a:spcAft>
-              <a:buNone/>
-            </a:pPr>
-            <a:r>
-              <a:rPr lang="cs"/>
-              <a:t>Problém určování autorství</a:t>
-            </a:r>
-            <a:endParaRPr/>
-          </a:p>
-        </p:txBody>
-      </p:sp>
-      <p:sp>
-        <p:nvSpPr>
-          <p:cNvPr id="62" name="Google Shape;62;p14"/>
-          <p:cNvSpPr txBox="1">
-            <a:spLocks noGrp="1"/>
-          </p:cNvSpPr>
-          <p:nvPr>
-            <p:ph type="body" idx="1"/>
-          </p:nvPr>
-        </p:nvSpPr>
-        <p:spPr>
-          <a:xfrm>
-            <a:off x="311700" y="1152475"/>
-            <a:ext cx="8520600" cy="3726900"/>
-          </a:xfrm>
-          <a:prstGeom prst="rect">
-            <a:avLst/>
-          </a:prstGeom>
-        </p:spPr>
-        <p:txBody>
-          <a:bodyPr spcFirstLastPara="1" wrap="square" lIns="91425" tIns="91425" rIns="91425" bIns="91425" anchor="t" anchorCtr="0">
-            <a:normAutofit/>
-          </a:bodyPr>
-          <a:lstStyle/>
-          <a:p>
-            <a:pPr marL="0" lvl="0" indent="0" algn="l" rtl="0">
-              <a:spcBef>
-                <a:spcPts val="0"/>
-              </a:spcBef>
-              <a:spcAft>
-                <a:spcPts val="0"/>
-              </a:spcAft>
-              <a:buNone/>
-            </a:pPr>
-            <a:r>
-              <a:rPr lang="cs"/>
-              <a:t>Určování autorství anonymních nebo sporných textů je dlouhodobě významným tématem v literární vědě.</a:t>
-            </a:r>
-            <a:endParaRPr/>
-          </a:p>
-          <a:p>
-            <a:pPr marL="457200" lvl="0" indent="-342900" algn="l" rtl="0">
-              <a:spcBef>
-                <a:spcPts val="1200"/>
-              </a:spcBef>
-              <a:spcAft>
-                <a:spcPts val="0"/>
-              </a:spcAft>
-              <a:buSzPts val="1800"/>
-              <a:buChar char="●"/>
-            </a:pPr>
-            <a:r>
-              <a:rPr lang="cs"/>
-              <a:t>historické texty bez jasné atribuce</a:t>
-            </a:r>
-            <a:endParaRPr/>
-          </a:p>
-          <a:p>
-            <a:pPr marL="457200" lvl="0" indent="-342900" algn="l" rtl="0">
-              <a:spcBef>
-                <a:spcPts val="0"/>
-              </a:spcBef>
-              <a:spcAft>
-                <a:spcPts val="0"/>
-              </a:spcAft>
-              <a:buSzPts val="1800"/>
-              <a:buChar char="●"/>
-            </a:pPr>
-            <a:r>
-              <a:rPr lang="cs"/>
-              <a:t>neúplné bibliografické záznamy v digitálních archivech</a:t>
-            </a:r>
-            <a:endParaRPr/>
-          </a:p>
-          <a:p>
-            <a:pPr marL="457200" lvl="0" indent="-342900" algn="l" rtl="0">
-              <a:spcBef>
-                <a:spcPts val="0"/>
-              </a:spcBef>
-              <a:spcAft>
-                <a:spcPts val="0"/>
-              </a:spcAft>
-              <a:buSzPts val="1800"/>
-              <a:buChar char="●"/>
-            </a:pPr>
-            <a:r>
-              <a:rPr lang="cs"/>
-              <a:t>potřeba ověření atribuce starých děl</a:t>
-            </a:r>
-            <a:endParaRPr/>
-          </a:p>
-          <a:p>
-            <a:pPr marL="457200" lvl="0" indent="-342900" algn="l" rtl="0">
-              <a:spcBef>
-                <a:spcPts val="0"/>
-              </a:spcBef>
-              <a:spcAft>
-                <a:spcPts val="0"/>
-              </a:spcAft>
-              <a:buSzPts val="1800"/>
-              <a:buChar char="●"/>
-            </a:pPr>
-            <a:r>
-              <a:rPr lang="cs"/>
-              <a:t>detekce plagiátů a neoprávněných autorství</a:t>
-            </a:r>
-            <a:endParaRPr/>
-          </a:p>
-          <a:p>
-            <a:pPr marL="0" lvl="0" indent="0" algn="l" rtl="0">
-              <a:spcBef>
-                <a:spcPts val="1200"/>
-              </a:spcBef>
-              <a:spcAft>
-                <a:spcPts val="1200"/>
-              </a:spcAft>
-              <a:buNone/>
-            </a:pPr>
-            <a:r>
-              <a:rPr lang="cs"/>
-              <a:t>Přesné určení autorství umožňuje nejen korekci nesprávné atribuce textů, ale i hlubší analýzu stylového vývoje jednotlivých autorů a lepší pochopení literárních dějin.</a:t>
-            </a:r>
-            <a:endParaRPr/>
-          </a:p>
-        </p:txBody>
-      </p:sp>
-    </p:spTree>
-  </p:cSld>
-  <p:clrMapOvr>
-    <a:masterClrMapping/>
-  </p:clrMapOvr>
-</p:sld>
-</file>
-
-<file path=ppt/slides/slide3.xml><?xml version="1.0" encoding="utf-8"?>
-<p:sld xmlns:a="http://schemas.openxmlformats.org/drawingml/2006/main" xmlns:r="http://schemas.openxmlformats.org/officeDocument/2006/relationships" xmlns:p="http://schemas.openxmlformats.org/presentationml/2006/main">
-  <p:cSld>
-    <p:spTree>
-      <p:nvGrpSpPr>
-        <p:cNvPr id="1" name="Shape 66"/>
-        <p:cNvGrpSpPr/>
-        <p:nvPr/>
-      </p:nvGrpSpPr>
-      <p:grpSpPr>
-        <a:xfrm>
-          <a:off x="0" y="0"/>
-          <a:ext cx="0" cy="0"/>
-          <a:chOff x="0" y="0"/>
-          <a:chExt cx="0" cy="0"/>
-        </a:xfrm>
-      </p:grpSpPr>
-      <p:sp>
-        <p:nvSpPr>
-          <p:cNvPr id="67" name="Google Shape;67;p15"/>
-          <p:cNvSpPr txBox="1">
-            <a:spLocks noGrp="1"/>
-          </p:cNvSpPr>
-          <p:nvPr>
-            <p:ph type="title"/>
-          </p:nvPr>
-        </p:nvSpPr>
-        <p:spPr>
-          <a:xfrm>
-            <a:off x="971937" y="299234"/>
-            <a:ext cx="7753500" cy="572700"/>
-          </a:xfrm>
-          <a:prstGeom prst="rect">
-            <a:avLst/>
-          </a:prstGeom>
-        </p:spPr>
-        <p:txBody>
-          <a:bodyPr spcFirstLastPara="1" wrap="square" lIns="91425" tIns="91425" rIns="91425" bIns="91425" anchor="t" anchorCtr="0">
-            <a:normAutofit fontScale="90000"/>
-          </a:bodyPr>
-          <a:lstStyle/>
-          <a:p>
-            <a:pPr marL="0" lvl="0" indent="0" algn="l" rtl="0">
-              <a:spcBef>
-                <a:spcPts val="0"/>
-              </a:spcBef>
-              <a:spcAft>
-                <a:spcPts val="0"/>
-              </a:spcAft>
-              <a:buNone/>
-            </a:pPr>
-            <a:r>
-              <a:rPr lang="cs"/>
-              <a:t>Zvolená metoda</a:t>
-            </a:r>
-            <a:endParaRPr/>
-          </a:p>
-        </p:txBody>
-      </p:sp>
-      <p:sp>
-        <p:nvSpPr>
-          <p:cNvPr id="68" name="Google Shape;68;p15"/>
-          <p:cNvSpPr txBox="1">
-            <a:spLocks noGrp="1"/>
-          </p:cNvSpPr>
-          <p:nvPr>
-            <p:ph type="body" idx="1"/>
-          </p:nvPr>
-        </p:nvSpPr>
-        <p:spPr>
-          <a:xfrm>
-            <a:off x="311700" y="1152475"/>
-            <a:ext cx="8520600" cy="3416400"/>
-          </a:xfrm>
-          <a:prstGeom prst="rect">
-            <a:avLst/>
-          </a:prstGeom>
-        </p:spPr>
-        <p:txBody>
-          <a:bodyPr spcFirstLastPara="1" wrap="square" lIns="91425" tIns="91425" rIns="91425" bIns="91425" anchor="t" anchorCtr="0">
-            <a:normAutofit/>
-          </a:bodyPr>
-          <a:lstStyle/>
-          <a:p>
-            <a:pPr marL="0" lvl="0" indent="0" algn="l" rtl="0">
-              <a:spcBef>
-                <a:spcPts val="0"/>
-              </a:spcBef>
-              <a:spcAft>
-                <a:spcPts val="0"/>
-              </a:spcAft>
-              <a:buNone/>
-            </a:pPr>
-            <a:r>
-              <a:rPr lang="cs" dirty="0"/>
-              <a:t>Předpoklady:</a:t>
-            </a:r>
-            <a:endParaRPr dirty="0"/>
-          </a:p>
-          <a:p>
-            <a:pPr marL="457200" lvl="0" indent="-342900" algn="l" rtl="0">
-              <a:spcBef>
-                <a:spcPts val="1200"/>
-              </a:spcBef>
-              <a:spcAft>
-                <a:spcPts val="0"/>
-              </a:spcAft>
-              <a:buSzPts val="1800"/>
-              <a:buChar char="●"/>
-            </a:pPr>
-            <a:r>
-              <a:rPr lang="cs" dirty="0"/>
-              <a:t>Každý autor má unikátní jazykový styl.</a:t>
-            </a:r>
-            <a:endParaRPr dirty="0"/>
-          </a:p>
-          <a:p>
-            <a:pPr marL="457200" lvl="0" indent="-342900" algn="l" rtl="0">
-              <a:spcBef>
-                <a:spcPts val="0"/>
-              </a:spcBef>
-              <a:spcAft>
-                <a:spcPts val="0"/>
-              </a:spcAft>
-              <a:buSzPts val="1800"/>
-              <a:buChar char="●"/>
-            </a:pPr>
-            <a:r>
-              <a:rPr lang="cs" dirty="0"/>
-              <a:t>Styl zůstává stabilní i přes různé témata.</a:t>
-            </a:r>
-            <a:endParaRPr dirty="0"/>
-          </a:p>
-          <a:p>
-            <a:pPr marL="457200" lvl="0" indent="-342900" algn="l" rtl="0">
-              <a:spcBef>
-                <a:spcPts val="0"/>
-              </a:spcBef>
-              <a:spcAft>
-                <a:spcPts val="0"/>
-              </a:spcAft>
-              <a:buSzPts val="1800"/>
-              <a:buChar char="●"/>
-            </a:pPr>
-            <a:r>
-              <a:rPr lang="cs" dirty="0"/>
-              <a:t>Strojovým učením lze natrénovat </a:t>
-            </a:r>
-            <a:r>
-              <a:rPr lang="cs"/>
-              <a:t>tyto vzory.</a:t>
-            </a:r>
-            <a:endParaRPr dirty="0"/>
-          </a:p>
-          <a:p>
-            <a:pPr marL="0" lvl="0" indent="0" algn="l" rtl="0">
-              <a:spcBef>
-                <a:spcPts val="0"/>
-              </a:spcBef>
-              <a:spcAft>
-                <a:spcPts val="0"/>
-              </a:spcAft>
-              <a:buNone/>
-            </a:pPr>
-            <a:endParaRPr dirty="0"/>
-          </a:p>
-          <a:p>
-            <a:pPr marL="0" lvl="0" indent="0" algn="l" rtl="0">
-              <a:spcBef>
-                <a:spcPts val="0"/>
-              </a:spcBef>
-              <a:spcAft>
-                <a:spcPts val="0"/>
-              </a:spcAft>
-              <a:buNone/>
-            </a:pPr>
-            <a:r>
-              <a:rPr lang="cs" dirty="0"/>
-              <a:t>⇒ </a:t>
-            </a:r>
-            <a:r>
-              <a:rPr lang="cs" b="1" dirty="0"/>
-              <a:t>Analýza statistických charakteristik textu</a:t>
-            </a:r>
-            <a:r>
-              <a:rPr lang="cs" dirty="0"/>
-              <a:t> (jazykový styl, nikoli obsah)</a:t>
-            </a:r>
-            <a:endParaRPr dirty="0"/>
-          </a:p>
-        </p:txBody>
-      </p:sp>
-    </p:spTree>
-  </p:cSld>
-  <p:clrMapOvr>
-    <a:masterClrMapping/>
-  </p:clrMapOvr>
-</p:sld>
-</file>
-
-<file path=ppt/slides/slide4.xml><?xml version="1.0" encoding="utf-8"?>
-<p:sld xmlns:a="http://schemas.openxmlformats.org/drawingml/2006/main" xmlns:r="http://schemas.openxmlformats.org/officeDocument/2006/relationships" xmlns:p="http://schemas.openxmlformats.org/presentationml/2006/main">
-  <p:cSld>
-    <p:spTree>
-      <p:nvGrpSpPr>
-        <p:cNvPr id="1" name="Shape 72"/>
-        <p:cNvGrpSpPr/>
-        <p:nvPr/>
-      </p:nvGrpSpPr>
-      <p:grpSpPr>
-        <a:xfrm>
-          <a:off x="0" y="0"/>
-          <a:ext cx="0" cy="0"/>
-          <a:chOff x="0" y="0"/>
-          <a:chExt cx="0" cy="0"/>
-        </a:xfrm>
-      </p:grpSpPr>
-      <p:sp>
-        <p:nvSpPr>
-          <p:cNvPr id="73" name="Google Shape;73;p16"/>
-          <p:cNvSpPr txBox="1">
-            <a:spLocks noGrp="1"/>
-          </p:cNvSpPr>
-          <p:nvPr>
-            <p:ph type="title"/>
-          </p:nvPr>
-        </p:nvSpPr>
-        <p:spPr>
-          <a:xfrm>
-            <a:off x="971937" y="299234"/>
-            <a:ext cx="7753500" cy="572700"/>
-          </a:xfrm>
-          <a:prstGeom prst="rect">
-            <a:avLst/>
-          </a:prstGeom>
-        </p:spPr>
-        <p:txBody>
-          <a:bodyPr spcFirstLastPara="1" wrap="square" lIns="91425" tIns="91425" rIns="91425" bIns="91425" anchor="t" anchorCtr="0">
-            <a:normAutofit fontScale="90000"/>
-          </a:bodyPr>
-          <a:lstStyle/>
-          <a:p>
-            <a:pPr marL="0" lvl="0" indent="0" algn="l" rtl="0">
-              <a:spcBef>
-                <a:spcPts val="0"/>
-              </a:spcBef>
-              <a:spcAft>
-                <a:spcPts val="0"/>
-              </a:spcAft>
-              <a:buNone/>
-            </a:pPr>
-            <a:r>
-              <a:rPr lang="cs"/>
-              <a:t>Technické řešení: korpus</a:t>
-            </a:r>
-            <a:endParaRPr/>
-          </a:p>
-        </p:txBody>
-      </p:sp>
-      <p:sp>
-        <p:nvSpPr>
-          <p:cNvPr id="74" name="Google Shape;74;p16"/>
-          <p:cNvSpPr txBox="1">
-            <a:spLocks noGrp="1"/>
-          </p:cNvSpPr>
-          <p:nvPr>
-            <p:ph type="body" idx="1"/>
-          </p:nvPr>
-        </p:nvSpPr>
-        <p:spPr>
-          <a:xfrm>
-            <a:off x="311700" y="1152475"/>
-            <a:ext cx="8520600" cy="3416400"/>
-          </a:xfrm>
-          <a:prstGeom prst="rect">
-            <a:avLst/>
-          </a:prstGeom>
-        </p:spPr>
-        <p:txBody>
-          <a:bodyPr spcFirstLastPara="1" wrap="square" lIns="91425" tIns="91425" rIns="91425" bIns="91425" anchor="t" anchorCtr="0">
-            <a:normAutofit/>
-          </a:bodyPr>
-          <a:lstStyle/>
-          <a:p>
-            <a:pPr marL="457200" lvl="0" indent="-342900" algn="l" rtl="0">
-              <a:spcBef>
-                <a:spcPts val="0"/>
-              </a:spcBef>
-              <a:spcAft>
-                <a:spcPts val="0"/>
-              </a:spcAft>
-              <a:buSzPts val="1800"/>
-              <a:buChar char="●"/>
-            </a:pPr>
-            <a:r>
-              <a:rPr lang="cs"/>
-              <a:t>vybrané knihy: v 1. fázi 23 českých autorů, v 2. fázi 325 autorů</a:t>
-            </a:r>
-            <a:endParaRPr/>
-          </a:p>
-          <a:p>
-            <a:pPr marL="457200" lvl="0" indent="-342900" algn="l" rtl="0">
-              <a:spcBef>
-                <a:spcPts val="0"/>
-              </a:spcBef>
-              <a:spcAft>
-                <a:spcPts val="0"/>
-              </a:spcAft>
-              <a:buSzPts val="1800"/>
-              <a:buChar char="●"/>
-            </a:pPr>
-            <a:r>
-              <a:rPr lang="cs"/>
-              <a:t>období: přelom 19. a 20. století</a:t>
-            </a:r>
-            <a:endParaRPr/>
-          </a:p>
-          <a:p>
-            <a:pPr marL="457200" lvl="0" indent="-342900" algn="l" rtl="0">
-              <a:spcBef>
-                <a:spcPts val="0"/>
-              </a:spcBef>
-              <a:spcAft>
-                <a:spcPts val="0"/>
-              </a:spcAft>
-              <a:buSzPts val="1800"/>
-              <a:buChar char="●"/>
-            </a:pPr>
-            <a:r>
-              <a:rPr lang="cs"/>
-              <a:t>zdroj: Národní digitální knihovna</a:t>
-            </a:r>
-            <a:endParaRPr/>
-          </a:p>
-          <a:p>
-            <a:pPr marL="457200" lvl="0" indent="-342900" algn="l" rtl="0">
-              <a:spcBef>
-                <a:spcPts val="0"/>
-              </a:spcBef>
-              <a:spcAft>
-                <a:spcPts val="0"/>
-              </a:spcAft>
-              <a:buSzPts val="1800"/>
-              <a:buChar char="●"/>
-            </a:pPr>
-            <a:r>
-              <a:rPr lang="cs"/>
-              <a:t>autoři: Čapek, Neruda, Jirásek, Heyduk atd.</a:t>
-            </a:r>
-            <a:endParaRPr/>
-          </a:p>
-        </p:txBody>
-      </p:sp>
-    </p:spTree>
-  </p:cSld>
-  <p:clrMapOvr>
-    <a:masterClrMapping/>
-  </p:clrMapOvr>
-</p:sld>
-</file>
-
-<file path=ppt/slides/slide5.xml><?xml version="1.0" encoding="utf-8"?>
-<p:sld xmlns:a="http://schemas.openxmlformats.org/drawingml/2006/main" xmlns:r="http://schemas.openxmlformats.org/officeDocument/2006/relationships" xmlns:p="http://schemas.openxmlformats.org/presentationml/2006/main">
-  <p:cSld>
-    <p:spTree>
-      <p:nvGrpSpPr>
-        <p:cNvPr id="1" name="Shape 78"/>
-        <p:cNvGrpSpPr/>
-        <p:nvPr/>
-      </p:nvGrpSpPr>
-      <p:grpSpPr>
-        <a:xfrm>
-          <a:off x="0" y="0"/>
-          <a:ext cx="0" cy="0"/>
-          <a:chOff x="0" y="0"/>
-          <a:chExt cx="0" cy="0"/>
-        </a:xfrm>
-      </p:grpSpPr>
-      <p:sp>
-        <p:nvSpPr>
-          <p:cNvPr id="79" name="Google Shape;79;p17"/>
-          <p:cNvSpPr txBox="1">
-            <a:spLocks noGrp="1"/>
-          </p:cNvSpPr>
-          <p:nvPr>
-            <p:ph type="title"/>
-          </p:nvPr>
-        </p:nvSpPr>
-        <p:spPr>
-          <a:xfrm>
-            <a:off x="971937" y="299234"/>
-            <a:ext cx="7753500" cy="572700"/>
-          </a:xfrm>
-          <a:prstGeom prst="rect">
-            <a:avLst/>
-          </a:prstGeom>
-        </p:spPr>
-        <p:txBody>
-          <a:bodyPr spcFirstLastPara="1" wrap="square" lIns="91425" tIns="91425" rIns="91425" bIns="91425" anchor="t" anchorCtr="0">
-            <a:normAutofit fontScale="90000"/>
-          </a:bodyPr>
-          <a:lstStyle/>
-          <a:p>
-            <a:pPr marL="0" lvl="0" indent="0" algn="l" rtl="0">
-              <a:spcBef>
-                <a:spcPts val="0"/>
-              </a:spcBef>
-              <a:spcAft>
-                <a:spcPts val="0"/>
-              </a:spcAft>
-              <a:buNone/>
-            </a:pPr>
-            <a:r>
-              <a:rPr lang="cs"/>
-              <a:t>Technické řešení: příprava dat</a:t>
-            </a:r>
-            <a:endParaRPr/>
-          </a:p>
-        </p:txBody>
-      </p:sp>
-      <p:sp>
-        <p:nvSpPr>
-          <p:cNvPr id="80" name="Google Shape;80;p17"/>
-          <p:cNvSpPr txBox="1">
-            <a:spLocks noGrp="1"/>
-          </p:cNvSpPr>
-          <p:nvPr>
-            <p:ph type="body" idx="1"/>
-          </p:nvPr>
-        </p:nvSpPr>
-        <p:spPr>
-          <a:xfrm>
-            <a:off x="311700" y="1152475"/>
-            <a:ext cx="8520600" cy="3416400"/>
-          </a:xfrm>
-          <a:prstGeom prst="rect">
-            <a:avLst/>
-          </a:prstGeom>
-        </p:spPr>
-        <p:txBody>
-          <a:bodyPr spcFirstLastPara="1" wrap="square" lIns="91425" tIns="91425" rIns="91425" bIns="91425" anchor="t" anchorCtr="0">
-            <a:normAutofit/>
-          </a:bodyPr>
-          <a:lstStyle/>
-          <a:p>
-            <a:pPr marL="457200" lvl="0" indent="-342900" algn="l" rtl="0">
-              <a:spcBef>
-                <a:spcPts val="0"/>
-              </a:spcBef>
-              <a:spcAft>
-                <a:spcPts val="0"/>
-              </a:spcAft>
-              <a:buSzPts val="1800"/>
-              <a:buChar char="●"/>
-            </a:pPr>
-            <a:r>
-              <a:rPr lang="cs"/>
-              <a:t>digitalizace: skenování a OCR vybraných knih</a:t>
-            </a:r>
-            <a:endParaRPr/>
-          </a:p>
-          <a:p>
-            <a:pPr marL="457200" lvl="0" indent="-342900" algn="l" rtl="0">
-              <a:spcBef>
-                <a:spcPts val="0"/>
-              </a:spcBef>
-              <a:spcAft>
-                <a:spcPts val="0"/>
-              </a:spcAft>
-              <a:buSzPts val="1800"/>
-              <a:buChar char="●"/>
-            </a:pPr>
-            <a:r>
-              <a:rPr lang="cs"/>
-              <a:t>čištění autorských textů od jiných částí knih: odstranění poznámek, obsahu, editorských poznámek</a:t>
-            </a:r>
-            <a:endParaRPr/>
-          </a:p>
-          <a:p>
-            <a:pPr marL="457200" lvl="0" indent="-342900" algn="l" rtl="0">
-              <a:spcBef>
-                <a:spcPts val="0"/>
-              </a:spcBef>
-              <a:spcAft>
-                <a:spcPts val="0"/>
-              </a:spcAft>
-              <a:buSzPts val="1800"/>
-              <a:buChar char="●"/>
-            </a:pPr>
-            <a:r>
-              <a:rPr lang="cs"/>
-              <a:t>normalizace: jednotné kódování UTF-8</a:t>
-            </a:r>
-            <a:endParaRPr/>
-          </a:p>
-          <a:p>
-            <a:pPr marL="457200" lvl="0" indent="-342900" algn="l" rtl="0">
-              <a:spcBef>
-                <a:spcPts val="0"/>
-              </a:spcBef>
-              <a:spcAft>
-                <a:spcPts val="0"/>
-              </a:spcAft>
-              <a:buSzPts val="1800"/>
-              <a:buChar char="●"/>
-            </a:pPr>
-            <a:r>
-              <a:rPr lang="cs"/>
-              <a:t>segmentace: rozdělení na segmenty po 1000, 500, 200 a 100 slovech</a:t>
-            </a:r>
-            <a:endParaRPr/>
-          </a:p>
-        </p:txBody>
-      </p:sp>
-    </p:spTree>
-  </p:cSld>
-  <p:clrMapOvr>
-    <a:masterClrMapping/>
-  </p:clrMapOvr>
-</p:sld>
-</file>
-
-<file path=ppt/slides/slide6.xml><?xml version="1.0" encoding="utf-8"?>
-<p:sld xmlns:a="http://schemas.openxmlformats.org/drawingml/2006/main" xmlns:r="http://schemas.openxmlformats.org/officeDocument/2006/relationships" xmlns:p="http://schemas.openxmlformats.org/presentationml/2006/main">
-  <p:cSld>
-    <p:spTree>
-      <p:nvGrpSpPr>
-        <p:cNvPr id="1" name="Shape 84"/>
-        <p:cNvGrpSpPr/>
-        <p:nvPr/>
-      </p:nvGrpSpPr>
-      <p:grpSpPr>
-        <a:xfrm>
-          <a:off x="0" y="0"/>
-          <a:ext cx="0" cy="0"/>
-          <a:chOff x="0" y="0"/>
-          <a:chExt cx="0" cy="0"/>
-        </a:xfrm>
-      </p:grpSpPr>
-      <p:sp>
-        <p:nvSpPr>
-          <p:cNvPr id="85" name="Google Shape;85;p18"/>
-          <p:cNvSpPr txBox="1">
-            <a:spLocks noGrp="1"/>
-          </p:cNvSpPr>
-          <p:nvPr>
-            <p:ph type="title"/>
-          </p:nvPr>
-        </p:nvSpPr>
-        <p:spPr>
-          <a:xfrm>
-            <a:off x="971937" y="299234"/>
-            <a:ext cx="7753500" cy="572700"/>
-          </a:xfrm>
-          <a:prstGeom prst="rect">
-            <a:avLst/>
-          </a:prstGeom>
-        </p:spPr>
-        <p:txBody>
-          <a:bodyPr spcFirstLastPara="1" wrap="square" lIns="91425" tIns="91425" rIns="91425" bIns="91425" anchor="t" anchorCtr="0">
-            <a:normAutofit fontScale="90000"/>
-          </a:bodyPr>
-          <a:lstStyle/>
-          <a:p>
-            <a:pPr marL="0" lvl="0" indent="0" algn="l" rtl="0">
-              <a:spcBef>
-                <a:spcPts val="0"/>
-              </a:spcBef>
-              <a:spcAft>
-                <a:spcPts val="0"/>
-              </a:spcAft>
-              <a:buNone/>
-            </a:pPr>
-            <a:r>
-              <a:rPr lang="cs"/>
-              <a:t>Technické řešení: zpracování</a:t>
-            </a:r>
-            <a:endParaRPr/>
-          </a:p>
-        </p:txBody>
-      </p:sp>
-      <p:sp>
-        <p:nvSpPr>
-          <p:cNvPr id="86" name="Google Shape;86;p18"/>
-          <p:cNvSpPr txBox="1">
-            <a:spLocks noGrp="1"/>
-          </p:cNvSpPr>
-          <p:nvPr>
-            <p:ph type="body" idx="1"/>
-          </p:nvPr>
-        </p:nvSpPr>
-        <p:spPr>
-          <a:xfrm>
-            <a:off x="311700" y="1152475"/>
-            <a:ext cx="8520600" cy="3833700"/>
-          </a:xfrm>
-          <a:prstGeom prst="rect">
-            <a:avLst/>
-          </a:prstGeom>
-        </p:spPr>
-        <p:txBody>
-          <a:bodyPr spcFirstLastPara="1" wrap="square" lIns="91425" tIns="91425" rIns="91425" bIns="91425" anchor="t" anchorCtr="0">
-            <a:normAutofit lnSpcReduction="20000"/>
-          </a:bodyPr>
-          <a:lstStyle/>
-          <a:p>
-            <a:pPr marL="0" lvl="0" indent="0" algn="l" rtl="0">
-              <a:spcBef>
-                <a:spcPts val="0"/>
-              </a:spcBef>
-              <a:spcAft>
-                <a:spcPts val="0"/>
-              </a:spcAft>
-              <a:buNone/>
-            </a:pPr>
-            <a:r>
-              <a:rPr lang="cs"/>
-              <a:t>Delexikace:</a:t>
-            </a:r>
-            <a:endParaRPr/>
-          </a:p>
-          <a:p>
-            <a:pPr marL="457200" lvl="0" indent="-342900" algn="l" rtl="0">
-              <a:spcBef>
-                <a:spcPts val="1200"/>
-              </a:spcBef>
-              <a:spcAft>
-                <a:spcPts val="0"/>
-              </a:spcAft>
-              <a:buSzPts val="1800"/>
-              <a:buChar char="●"/>
-            </a:pPr>
-            <a:r>
-              <a:rPr lang="cs"/>
-              <a:t>nahrazení významových slov (autosémantika – podstatná jména, přídavná jména, slovesa, příslovce) slovním druhem (POS tagy), např. „pes běžel rychle“ se převede na tagy: NOUN, VERB, ADV,</a:t>
-            </a:r>
-            <a:endParaRPr/>
-          </a:p>
-          <a:p>
-            <a:pPr marL="457200" lvl="0" indent="-342900" algn="l" rtl="0">
-              <a:spcBef>
-                <a:spcPts val="0"/>
-              </a:spcBef>
-              <a:spcAft>
-                <a:spcPts val="0"/>
-              </a:spcAft>
-              <a:buSzPts val="1800"/>
-              <a:buChar char="●"/>
-            </a:pPr>
-            <a:r>
-              <a:rPr lang="cs"/>
-              <a:t>ponechána funkční slova (synsémantika – předložky, spojky, zájmena, částice), např. „v“, „a“, „který“, „že“ zůstanou, protože funkční slova se používají velmi často a jejich frekvence je velmi typická pro styl autora,</a:t>
-            </a:r>
-            <a:endParaRPr/>
-          </a:p>
-          <a:p>
-            <a:pPr marL="457200" lvl="0" indent="-342900" algn="l" rtl="0">
-              <a:spcBef>
-                <a:spcPts val="0"/>
-              </a:spcBef>
-              <a:spcAft>
-                <a:spcPts val="0"/>
-              </a:spcAft>
-              <a:buSzPts val="1800"/>
-              <a:buChar char="●"/>
-            </a:pPr>
-            <a:r>
-              <a:rPr lang="cs"/>
-              <a:t>generování n-gramů: kombinace slov pro detekci vzorů</a:t>
-            </a:r>
-            <a:endParaRPr/>
-          </a:p>
-          <a:p>
-            <a:pPr marL="0" lvl="0" indent="0" algn="l" rtl="0">
-              <a:spcBef>
-                <a:spcPts val="1200"/>
-              </a:spcBef>
-              <a:spcAft>
-                <a:spcPts val="0"/>
-              </a:spcAft>
-              <a:buNone/>
-            </a:pPr>
-            <a:r>
-              <a:rPr lang="cs"/>
-              <a:t>Klasifikace textu pomocí metody Support Vector Machine (LinearSVC klasifikátor):</a:t>
-            </a:r>
-            <a:endParaRPr/>
-          </a:p>
-          <a:p>
-            <a:pPr marL="457200" lvl="0" indent="-342900" algn="l" rtl="0">
-              <a:spcBef>
-                <a:spcPts val="1200"/>
-              </a:spcBef>
-              <a:spcAft>
-                <a:spcPts val="0"/>
-              </a:spcAft>
-              <a:buSzPts val="1800"/>
-              <a:buChar char="●"/>
-            </a:pPr>
-            <a:r>
-              <a:rPr lang="cs"/>
-              <a:t>trénování: 60% textu daného titulu</a:t>
-            </a:r>
-            <a:endParaRPr/>
-          </a:p>
-          <a:p>
-            <a:pPr marL="457200" lvl="0" indent="-342900" algn="l" rtl="0">
-              <a:spcBef>
-                <a:spcPts val="0"/>
-              </a:spcBef>
-              <a:spcAft>
-                <a:spcPts val="0"/>
-              </a:spcAft>
-              <a:buSzPts val="1800"/>
-              <a:buChar char="●"/>
-            </a:pPr>
-            <a:r>
-              <a:rPr lang="cs"/>
-              <a:t>testování: zbylých 40% textu (20% ve 2 nezávislých sadách)</a:t>
-            </a:r>
-            <a:endParaRPr/>
-          </a:p>
-          <a:p>
-            <a:pPr marL="457200" lvl="0" indent="-342900" algn="l" rtl="0">
-              <a:spcBef>
-                <a:spcPts val="0"/>
-              </a:spcBef>
-              <a:spcAft>
-                <a:spcPts val="0"/>
-              </a:spcAft>
-              <a:buSzPts val="1800"/>
-              <a:buChar char="●"/>
-            </a:pPr>
-            <a:r>
-              <a:rPr lang="cs"/>
-              <a:t>vyhodnocení: % přesnost rozpoznání autorů</a:t>
-            </a:r>
-            <a:endParaRPr/>
-          </a:p>
-        </p:txBody>
-      </p:sp>
-    </p:spTree>
-  </p:cSld>
-  <p:clrMapOvr>
-    <a:masterClrMapping/>
-  </p:clrMapOvr>
-</p:sld>
-</file>
-
-<file path=ppt/slides/slide7.xml><?xml version="1.0" encoding="utf-8"?>
-<p:sld xmlns:a="http://schemas.openxmlformats.org/drawingml/2006/main" xmlns:r="http://schemas.openxmlformats.org/officeDocument/2006/relationships" xmlns:p="http://schemas.openxmlformats.org/presentationml/2006/main">
-  <p:cSld>
-    <p:spTree>
-      <p:nvGrpSpPr>
-        <p:cNvPr id="1" name="Shape 90"/>
-        <p:cNvGrpSpPr/>
-        <p:nvPr/>
-      </p:nvGrpSpPr>
-      <p:grpSpPr>
-        <a:xfrm>
-          <a:off x="0" y="0"/>
-          <a:ext cx="0" cy="0"/>
-          <a:chOff x="0" y="0"/>
-          <a:chExt cx="0" cy="0"/>
-        </a:xfrm>
-      </p:grpSpPr>
-      <p:sp>
-        <p:nvSpPr>
-          <p:cNvPr id="91" name="Google Shape;91;p19"/>
-          <p:cNvSpPr txBox="1">
-            <a:spLocks noGrp="1"/>
-          </p:cNvSpPr>
-          <p:nvPr>
-            <p:ph type="title"/>
-          </p:nvPr>
-        </p:nvSpPr>
-        <p:spPr>
-          <a:xfrm>
-            <a:off x="971937" y="299234"/>
-            <a:ext cx="7753500" cy="572700"/>
-          </a:xfrm>
-          <a:prstGeom prst="rect">
-            <a:avLst/>
-          </a:prstGeom>
-        </p:spPr>
-        <p:txBody>
-          <a:bodyPr spcFirstLastPara="1" wrap="square" lIns="91425" tIns="91425" rIns="91425" bIns="91425" anchor="t" anchorCtr="0">
-            <a:normAutofit fontScale="90000"/>
-          </a:bodyPr>
-          <a:lstStyle/>
-          <a:p>
-            <a:pPr marL="0" lvl="0" indent="0" algn="l" rtl="0">
-              <a:spcBef>
-                <a:spcPts val="0"/>
-              </a:spcBef>
-              <a:spcAft>
-                <a:spcPts val="0"/>
-              </a:spcAft>
-              <a:buNone/>
-            </a:pPr>
-            <a:r>
-              <a:rPr lang="cs"/>
-              <a:t>Výsledky a zjištění</a:t>
-            </a:r>
-            <a:endParaRPr/>
-          </a:p>
-        </p:txBody>
-      </p:sp>
-      <p:sp>
-        <p:nvSpPr>
-          <p:cNvPr id="92" name="Google Shape;92;p19"/>
-          <p:cNvSpPr txBox="1">
-            <a:spLocks noGrp="1"/>
-          </p:cNvSpPr>
-          <p:nvPr>
-            <p:ph type="body" idx="1"/>
-          </p:nvPr>
-        </p:nvSpPr>
-        <p:spPr>
-          <a:xfrm>
-            <a:off x="311700" y="1152475"/>
-            <a:ext cx="8520600" cy="3416400"/>
-          </a:xfrm>
-          <a:prstGeom prst="rect">
-            <a:avLst/>
-          </a:prstGeom>
-        </p:spPr>
-        <p:txBody>
-          <a:bodyPr spcFirstLastPara="1" wrap="square" lIns="91425" tIns="91425" rIns="91425" bIns="91425" anchor="t" anchorCtr="0">
-            <a:normAutofit/>
-          </a:bodyPr>
-          <a:lstStyle/>
-          <a:p>
-            <a:pPr marL="457200" lvl="0" indent="-342900" algn="l" rtl="0">
-              <a:spcBef>
-                <a:spcPts val="0"/>
-              </a:spcBef>
-              <a:spcAft>
-                <a:spcPts val="0"/>
-              </a:spcAft>
-              <a:buSzPts val="1800"/>
-              <a:buChar char="●"/>
-            </a:pPr>
-            <a:r>
-              <a:rPr lang="cs"/>
-              <a:t>přesnost je dána délkou textového originálu</a:t>
-            </a:r>
-            <a:endParaRPr/>
-          </a:p>
-          <a:p>
-            <a:pPr marL="457200" lvl="0" indent="-342900" algn="l" rtl="0">
-              <a:spcBef>
-                <a:spcPts val="0"/>
-              </a:spcBef>
-              <a:spcAft>
-                <a:spcPts val="0"/>
-              </a:spcAft>
-              <a:buSzPts val="1800"/>
-              <a:buChar char="●"/>
-            </a:pPr>
-            <a:r>
-              <a:rPr lang="cs"/>
-              <a:t>při 1000 slovech dosahuje přesnost 96% u 23 autorů, 82% u 325 autorů</a:t>
-            </a:r>
-            <a:endParaRPr/>
-          </a:p>
-          <a:p>
-            <a:pPr marL="457200" lvl="0" indent="-342900" algn="l" rtl="0">
-              <a:spcBef>
-                <a:spcPts val="0"/>
-              </a:spcBef>
-              <a:spcAft>
-                <a:spcPts val="0"/>
-              </a:spcAft>
-              <a:buSzPts val="1800"/>
-              <a:buChar char="●"/>
-            </a:pPr>
-            <a:r>
-              <a:rPr lang="cs"/>
-              <a:t>autoři s konzistentním stylem jsou lépe rozpoznatelní</a:t>
-            </a:r>
-            <a:endParaRPr/>
-          </a:p>
-          <a:p>
-            <a:pPr marL="457200" lvl="0" indent="-342900" algn="l" rtl="0">
-              <a:spcBef>
-                <a:spcPts val="0"/>
-              </a:spcBef>
-              <a:spcAft>
-                <a:spcPts val="0"/>
-              </a:spcAft>
-              <a:buSzPts val="1800"/>
-              <a:buChar char="●"/>
-            </a:pPr>
-            <a:r>
-              <a:rPr lang="cs"/>
-              <a:t>u kratších textů s 50 slovy klesá přesnost na 42%</a:t>
-            </a:r>
-            <a:endParaRPr/>
-          </a:p>
-          <a:p>
-            <a:pPr marL="0" lvl="0" indent="0" algn="l" rtl="0">
-              <a:spcBef>
-                <a:spcPts val="1200"/>
-              </a:spcBef>
-              <a:spcAft>
-                <a:spcPts val="1200"/>
-              </a:spcAft>
-              <a:buNone/>
-            </a:pPr>
-            <a:r>
-              <a:rPr lang="cs"/>
-              <a:t>Někteří autoři mají značné rozdíly mezi jednotlivými díly, tj. mají nízkou konzistenci stylu ⇒ ztížené určování autorství </a:t>
-            </a:r>
-            <a:endParaRPr/>
-          </a:p>
-        </p:txBody>
-      </p:sp>
-    </p:spTree>
-  </p:cSld>
-  <p:clrMapOvr>
-    <a:masterClrMapping/>
-  </p:clrMapOvr>
-</p:sld>
-</file>
-
-<file path=ppt/slides/slide8.xml><?xml version="1.0" encoding="utf-8"?>
-<p:sld xmlns:a="http://schemas.openxmlformats.org/drawingml/2006/main" xmlns:r="http://schemas.openxmlformats.org/officeDocument/2006/relationships" xmlns:p="http://schemas.openxmlformats.org/presentationml/2006/main">
-  <p:cSld>
-    <p:spTree>
-      <p:nvGrpSpPr>
-        <p:cNvPr id="1" name="Shape 96"/>
-        <p:cNvGrpSpPr/>
-        <p:nvPr/>
-      </p:nvGrpSpPr>
-      <p:grpSpPr>
-        <a:xfrm>
-          <a:off x="0" y="0"/>
-          <a:ext cx="0" cy="0"/>
-          <a:chOff x="0" y="0"/>
-          <a:chExt cx="0" cy="0"/>
-        </a:xfrm>
-      </p:grpSpPr>
-      <p:sp>
-        <p:nvSpPr>
-          <p:cNvPr id="97" name="Google Shape;97;p20"/>
-          <p:cNvSpPr txBox="1">
-            <a:spLocks noGrp="1"/>
-          </p:cNvSpPr>
-          <p:nvPr>
-            <p:ph type="title"/>
-          </p:nvPr>
-        </p:nvSpPr>
-        <p:spPr>
-          <a:xfrm>
-            <a:off x="971937" y="299234"/>
-            <a:ext cx="7753500" cy="572700"/>
-          </a:xfrm>
-          <a:prstGeom prst="rect">
-            <a:avLst/>
-          </a:prstGeom>
-        </p:spPr>
-        <p:txBody>
-          <a:bodyPr spcFirstLastPara="1" wrap="square" lIns="91425" tIns="91425" rIns="91425" bIns="91425" anchor="t" anchorCtr="0">
-            <a:normAutofit fontScale="90000"/>
-          </a:bodyPr>
-          <a:lstStyle/>
-          <a:p>
-            <a:pPr marL="0" lvl="0" indent="0" algn="l" rtl="0">
-              <a:spcBef>
-                <a:spcPts val="0"/>
-              </a:spcBef>
-              <a:spcAft>
-                <a:spcPts val="0"/>
-              </a:spcAft>
-              <a:buNone/>
-            </a:pPr>
-            <a:r>
-              <a:rPr lang="cs"/>
-              <a:t>Výsledky testování na sadách train, test a devel</a:t>
-            </a:r>
-            <a:endParaRPr/>
-          </a:p>
-        </p:txBody>
-      </p:sp>
-      <p:pic>
-        <p:nvPicPr>
-          <p:cNvPr id="98" name="Google Shape;98;p20" title="Snímek obrazovky 2025-11-26 v 20.41.22.png"/>
-          <p:cNvPicPr preferRelativeResize="0"/>
-          <p:nvPr/>
-        </p:nvPicPr>
-        <p:blipFill>
-          <a:blip r:embed="rId3">
-            <a:alphaModFix/>
-          </a:blip>
-          <a:stretch>
-            <a:fillRect/>
-          </a:stretch>
-        </p:blipFill>
-        <p:spPr>
-          <a:xfrm>
-            <a:off x="1457425" y="975734"/>
-            <a:ext cx="6229158" cy="3966767"/>
-          </a:xfrm>
-          <a:prstGeom prst="rect">
-            <a:avLst/>
-          </a:prstGeom>
-          <a:noFill/>
-          <a:ln>
-            <a:noFill/>
-          </a:ln>
-        </p:spPr>
-      </p:pic>
-    </p:spTree>
-  </p:cSld>
-  <p:clrMapOvr>
-    <a:masterClrMapping/>
-  </p:clrMapOvr>
-</p:sld>
-</file>
-
-<file path=ppt/slides/slide9.xml><?xml version="1.0" encoding="utf-8"?>
 <p:sld xmlns:a="http://schemas.openxmlformats.org/drawingml/2006/main" xmlns:r="http://schemas.openxmlformats.org/officeDocument/2006/relationships" xmlns:p="http://schemas.openxmlformats.org/presentationml/2006/main">
   <p:cSld>
     <p:spTree>
@@ -8289,6 +6932,1490 @@
           <a:xfrm>
             <a:off x="6379123" y="2844418"/>
             <a:ext cx="1462500" cy="2056107"/>
+          </a:xfrm>
+          <a:prstGeom prst="rect">
+            <a:avLst/>
+          </a:prstGeom>
+          <a:noFill/>
+          <a:ln>
+            <a:noFill/>
+          </a:ln>
+        </p:spPr>
+      </p:pic>
+    </p:spTree>
+  </p:cSld>
+  <p:clrMapOvr>
+    <a:masterClrMapping/>
+  </p:clrMapOvr>
+</p:sld>
+</file>
+
+<file path=ppt/slides/slide11.xml><?xml version="1.0" encoding="utf-8"?>
+<p:sld xmlns:a="http://schemas.openxmlformats.org/drawingml/2006/main" xmlns:r="http://schemas.openxmlformats.org/officeDocument/2006/relationships" xmlns:p="http://schemas.openxmlformats.org/presentationml/2006/main">
+  <p:cSld>
+    <p:spTree>
+      <p:nvGrpSpPr>
+        <p:cNvPr id="1" name="Shape 112"/>
+        <p:cNvGrpSpPr/>
+        <p:nvPr/>
+      </p:nvGrpSpPr>
+      <p:grpSpPr>
+        <a:xfrm>
+          <a:off x="0" y="0"/>
+          <a:ext cx="0" cy="0"/>
+          <a:chOff x="0" y="0"/>
+          <a:chExt cx="0" cy="0"/>
+        </a:xfrm>
+      </p:grpSpPr>
+      <p:sp>
+        <p:nvSpPr>
+          <p:cNvPr id="113" name="Google Shape;113;p22"/>
+          <p:cNvSpPr txBox="1">
+            <a:spLocks noGrp="1"/>
+          </p:cNvSpPr>
+          <p:nvPr>
+            <p:ph type="title"/>
+          </p:nvPr>
+        </p:nvSpPr>
+        <p:spPr>
+          <a:xfrm>
+            <a:off x="971937" y="299234"/>
+            <a:ext cx="7753500" cy="572700"/>
+          </a:xfrm>
+          <a:prstGeom prst="rect">
+            <a:avLst/>
+          </a:prstGeom>
+        </p:spPr>
+        <p:txBody>
+          <a:bodyPr spcFirstLastPara="1" wrap="square" lIns="91425" tIns="91425" rIns="91425" bIns="91425" anchor="t" anchorCtr="0">
+            <a:normAutofit fontScale="90000"/>
+          </a:bodyPr>
+          <a:lstStyle/>
+          <a:p>
+            <a:pPr marL="0" lvl="0" indent="0" algn="l" rtl="0">
+              <a:spcBef>
+                <a:spcPts val="0"/>
+              </a:spcBef>
+              <a:spcAft>
+                <a:spcPts val="0"/>
+              </a:spcAft>
+              <a:buNone/>
+            </a:pPr>
+            <a:r>
+              <a:rPr lang="cs"/>
+              <a:t>Praktická aplikace</a:t>
+            </a:r>
+            <a:endParaRPr/>
+          </a:p>
+        </p:txBody>
+      </p:sp>
+      <p:sp>
+        <p:nvSpPr>
+          <p:cNvPr id="114" name="Google Shape;114;p22"/>
+          <p:cNvSpPr txBox="1">
+            <a:spLocks noGrp="1"/>
+          </p:cNvSpPr>
+          <p:nvPr>
+            <p:ph type="body" idx="1"/>
+          </p:nvPr>
+        </p:nvSpPr>
+        <p:spPr>
+          <a:xfrm>
+            <a:off x="311700" y="1152475"/>
+            <a:ext cx="8520600" cy="3416400"/>
+          </a:xfrm>
+          <a:prstGeom prst="rect">
+            <a:avLst/>
+          </a:prstGeom>
+        </p:spPr>
+        <p:txBody>
+          <a:bodyPr spcFirstLastPara="1" wrap="square" lIns="91425" tIns="91425" rIns="91425" bIns="91425" anchor="t" anchorCtr="0">
+            <a:normAutofit/>
+          </a:bodyPr>
+          <a:lstStyle/>
+          <a:p>
+            <a:pPr marL="457200" lvl="0" indent="-342900" algn="l" rtl="0">
+              <a:spcBef>
+                <a:spcPts val="0"/>
+              </a:spcBef>
+              <a:spcAft>
+                <a:spcPts val="0"/>
+              </a:spcAft>
+              <a:buSzPts val="1800"/>
+              <a:buChar char="●"/>
+            </a:pPr>
+            <a:r>
+              <a:rPr lang="cs" dirty="0"/>
+              <a:t>Detekce plagiátů: najít neoprávněné kopie</a:t>
+            </a:r>
+            <a:endParaRPr dirty="0"/>
+          </a:p>
+          <a:p>
+            <a:pPr marL="457200" lvl="0" indent="-342900" algn="l" rtl="0">
+              <a:spcBef>
+                <a:spcPts val="0"/>
+              </a:spcBef>
+              <a:spcAft>
+                <a:spcPts val="0"/>
+              </a:spcAft>
+              <a:buSzPts val="1800"/>
+              <a:buChar char="●"/>
+            </a:pPr>
+            <a:r>
+              <a:rPr lang="cs" dirty="0"/>
+              <a:t>Verifikace metadat: ověření správnosti autorství v digitálních knihovnách</a:t>
+            </a:r>
+            <a:endParaRPr dirty="0"/>
+          </a:p>
+          <a:p>
+            <a:pPr marL="457200" lvl="0" indent="-342900" algn="l" rtl="0">
+              <a:spcBef>
+                <a:spcPts val="0"/>
+              </a:spcBef>
+              <a:spcAft>
+                <a:spcPts val="0"/>
+              </a:spcAft>
+              <a:buSzPts val="1800"/>
+              <a:buChar char="●"/>
+            </a:pPr>
+            <a:r>
+              <a:rPr lang="cs" dirty="0"/>
+              <a:t>Identifikace anonymních textů</a:t>
+            </a:r>
+          </a:p>
+          <a:p>
+            <a:pPr marL="457200" lvl="0" indent="-342900" algn="l" rtl="0">
+              <a:spcBef>
+                <a:spcPts val="0"/>
+              </a:spcBef>
+              <a:spcAft>
+                <a:spcPts val="0"/>
+              </a:spcAft>
+              <a:buSzPts val="1800"/>
+              <a:buChar char="●"/>
+            </a:pPr>
+            <a:endParaRPr lang="cs" dirty="0"/>
+          </a:p>
+          <a:p>
+            <a:pPr marL="114300" lvl="0" indent="0" algn="l" rtl="0">
+              <a:spcBef>
+                <a:spcPts val="0"/>
+              </a:spcBef>
+              <a:spcAft>
+                <a:spcPts val="0"/>
+              </a:spcAft>
+              <a:buSzPts val="1800"/>
+              <a:buNone/>
+            </a:pPr>
+            <a:r>
+              <a:rPr lang="cs" dirty="0"/>
+              <a:t>Produkt AuthorGuesser</a:t>
+            </a:r>
+            <a:endParaRPr dirty="0"/>
+          </a:p>
+        </p:txBody>
+      </p:sp>
+    </p:spTree>
+  </p:cSld>
+  <p:clrMapOvr>
+    <a:masterClrMapping/>
+  </p:clrMapOvr>
+</p:sld>
+</file>
+
+<file path=ppt/slides/slide2.xml><?xml version="1.0" encoding="utf-8"?>
+<p:sld xmlns:a="http://schemas.openxmlformats.org/drawingml/2006/main" xmlns:r="http://schemas.openxmlformats.org/officeDocument/2006/relationships" xmlns:p="http://schemas.openxmlformats.org/presentationml/2006/main">
+  <p:cSld>
+    <p:spTree>
+      <p:nvGrpSpPr>
+        <p:cNvPr id="1" name="Shape 60"/>
+        <p:cNvGrpSpPr/>
+        <p:nvPr/>
+      </p:nvGrpSpPr>
+      <p:grpSpPr>
+        <a:xfrm>
+          <a:off x="0" y="0"/>
+          <a:ext cx="0" cy="0"/>
+          <a:chOff x="0" y="0"/>
+          <a:chExt cx="0" cy="0"/>
+        </a:xfrm>
+      </p:grpSpPr>
+      <p:sp>
+        <p:nvSpPr>
+          <p:cNvPr id="61" name="Google Shape;61;p14"/>
+          <p:cNvSpPr txBox="1">
+            <a:spLocks noGrp="1"/>
+          </p:cNvSpPr>
+          <p:nvPr>
+            <p:ph type="title"/>
+          </p:nvPr>
+        </p:nvSpPr>
+        <p:spPr>
+          <a:xfrm>
+            <a:off x="971937" y="299234"/>
+            <a:ext cx="7753500" cy="572700"/>
+          </a:xfrm>
+          <a:prstGeom prst="rect">
+            <a:avLst/>
+          </a:prstGeom>
+        </p:spPr>
+        <p:txBody>
+          <a:bodyPr spcFirstLastPara="1" wrap="square" lIns="91425" tIns="91425" rIns="91425" bIns="91425" anchor="t" anchorCtr="0">
+            <a:normAutofit fontScale="90000"/>
+          </a:bodyPr>
+          <a:lstStyle/>
+          <a:p>
+            <a:pPr marL="0" lvl="0" indent="0" algn="l" rtl="0">
+              <a:spcBef>
+                <a:spcPts val="0"/>
+              </a:spcBef>
+              <a:spcAft>
+                <a:spcPts val="0"/>
+              </a:spcAft>
+              <a:buNone/>
+            </a:pPr>
+            <a:r>
+              <a:rPr lang="cs"/>
+              <a:t>Problém určování autorství</a:t>
+            </a:r>
+            <a:endParaRPr/>
+          </a:p>
+        </p:txBody>
+      </p:sp>
+      <p:sp>
+        <p:nvSpPr>
+          <p:cNvPr id="62" name="Google Shape;62;p14"/>
+          <p:cNvSpPr txBox="1">
+            <a:spLocks noGrp="1"/>
+          </p:cNvSpPr>
+          <p:nvPr>
+            <p:ph type="body" idx="1"/>
+          </p:nvPr>
+        </p:nvSpPr>
+        <p:spPr>
+          <a:xfrm>
+            <a:off x="311700" y="1152475"/>
+            <a:ext cx="8520600" cy="3726900"/>
+          </a:xfrm>
+          <a:prstGeom prst="rect">
+            <a:avLst/>
+          </a:prstGeom>
+        </p:spPr>
+        <p:txBody>
+          <a:bodyPr spcFirstLastPara="1" wrap="square" lIns="91425" tIns="91425" rIns="91425" bIns="91425" anchor="t" anchorCtr="0">
+            <a:normAutofit/>
+          </a:bodyPr>
+          <a:lstStyle/>
+          <a:p>
+            <a:pPr marL="0" lvl="0" indent="0" algn="l" rtl="0">
+              <a:spcBef>
+                <a:spcPts val="0"/>
+              </a:spcBef>
+              <a:spcAft>
+                <a:spcPts val="0"/>
+              </a:spcAft>
+              <a:buNone/>
+            </a:pPr>
+            <a:r>
+              <a:rPr lang="cs"/>
+              <a:t>Určování autorství anonymních nebo sporných textů je dlouhodobě významným tématem v literární vědě.</a:t>
+            </a:r>
+            <a:endParaRPr/>
+          </a:p>
+          <a:p>
+            <a:pPr marL="457200" lvl="0" indent="-342900" algn="l" rtl="0">
+              <a:spcBef>
+                <a:spcPts val="1200"/>
+              </a:spcBef>
+              <a:spcAft>
+                <a:spcPts val="0"/>
+              </a:spcAft>
+              <a:buSzPts val="1800"/>
+              <a:buChar char="●"/>
+            </a:pPr>
+            <a:r>
+              <a:rPr lang="cs"/>
+              <a:t>historické texty bez jasné atribuce</a:t>
+            </a:r>
+            <a:endParaRPr/>
+          </a:p>
+          <a:p>
+            <a:pPr marL="457200" lvl="0" indent="-342900" algn="l" rtl="0">
+              <a:spcBef>
+                <a:spcPts val="0"/>
+              </a:spcBef>
+              <a:spcAft>
+                <a:spcPts val="0"/>
+              </a:spcAft>
+              <a:buSzPts val="1800"/>
+              <a:buChar char="●"/>
+            </a:pPr>
+            <a:r>
+              <a:rPr lang="cs"/>
+              <a:t>neúplné bibliografické záznamy v digitálních archivech</a:t>
+            </a:r>
+            <a:endParaRPr/>
+          </a:p>
+          <a:p>
+            <a:pPr marL="457200" lvl="0" indent="-342900" algn="l" rtl="0">
+              <a:spcBef>
+                <a:spcPts val="0"/>
+              </a:spcBef>
+              <a:spcAft>
+                <a:spcPts val="0"/>
+              </a:spcAft>
+              <a:buSzPts val="1800"/>
+              <a:buChar char="●"/>
+            </a:pPr>
+            <a:r>
+              <a:rPr lang="cs"/>
+              <a:t>potřeba ověření atribuce starých děl</a:t>
+            </a:r>
+            <a:endParaRPr/>
+          </a:p>
+          <a:p>
+            <a:pPr marL="457200" lvl="0" indent="-342900" algn="l" rtl="0">
+              <a:spcBef>
+                <a:spcPts val="0"/>
+              </a:spcBef>
+              <a:spcAft>
+                <a:spcPts val="0"/>
+              </a:spcAft>
+              <a:buSzPts val="1800"/>
+              <a:buChar char="●"/>
+            </a:pPr>
+            <a:r>
+              <a:rPr lang="cs"/>
+              <a:t>detekce plagiátů a neoprávněných autorství</a:t>
+            </a:r>
+            <a:endParaRPr/>
+          </a:p>
+          <a:p>
+            <a:pPr marL="0" lvl="0" indent="0" algn="l" rtl="0">
+              <a:spcBef>
+                <a:spcPts val="1200"/>
+              </a:spcBef>
+              <a:spcAft>
+                <a:spcPts val="1200"/>
+              </a:spcAft>
+              <a:buNone/>
+            </a:pPr>
+            <a:r>
+              <a:rPr lang="cs"/>
+              <a:t>Přesné určení autorství umožňuje nejen korekci nesprávné atribuce textů, ale i hlubší analýzu stylového vývoje jednotlivých autorů a lepší pochopení literárních dějin.</a:t>
+            </a:r>
+            <a:endParaRPr/>
+          </a:p>
+        </p:txBody>
+      </p:sp>
+    </p:spTree>
+  </p:cSld>
+  <p:clrMapOvr>
+    <a:masterClrMapping/>
+  </p:clrMapOvr>
+</p:sld>
+</file>
+
+<file path=ppt/slides/slide3.xml><?xml version="1.0" encoding="utf-8"?>
+<p:sld xmlns:a="http://schemas.openxmlformats.org/drawingml/2006/main" xmlns:r="http://schemas.openxmlformats.org/officeDocument/2006/relationships" xmlns:p="http://schemas.openxmlformats.org/presentationml/2006/main">
+  <p:cSld>
+    <p:spTree>
+      <p:nvGrpSpPr>
+        <p:cNvPr id="1" name="Shape 66"/>
+        <p:cNvGrpSpPr/>
+        <p:nvPr/>
+      </p:nvGrpSpPr>
+      <p:grpSpPr>
+        <a:xfrm>
+          <a:off x="0" y="0"/>
+          <a:ext cx="0" cy="0"/>
+          <a:chOff x="0" y="0"/>
+          <a:chExt cx="0" cy="0"/>
+        </a:xfrm>
+      </p:grpSpPr>
+      <p:sp>
+        <p:nvSpPr>
+          <p:cNvPr id="67" name="Google Shape;67;p15"/>
+          <p:cNvSpPr txBox="1">
+            <a:spLocks noGrp="1"/>
+          </p:cNvSpPr>
+          <p:nvPr>
+            <p:ph type="title"/>
+          </p:nvPr>
+        </p:nvSpPr>
+        <p:spPr>
+          <a:xfrm>
+            <a:off x="971937" y="299234"/>
+            <a:ext cx="7753500" cy="572700"/>
+          </a:xfrm>
+          <a:prstGeom prst="rect">
+            <a:avLst/>
+          </a:prstGeom>
+        </p:spPr>
+        <p:txBody>
+          <a:bodyPr spcFirstLastPara="1" wrap="square" lIns="91425" tIns="91425" rIns="91425" bIns="91425" anchor="t" anchorCtr="0">
+            <a:normAutofit fontScale="90000"/>
+          </a:bodyPr>
+          <a:lstStyle/>
+          <a:p>
+            <a:pPr marL="0" lvl="0" indent="0" algn="l" rtl="0">
+              <a:spcBef>
+                <a:spcPts val="0"/>
+              </a:spcBef>
+              <a:spcAft>
+                <a:spcPts val="0"/>
+              </a:spcAft>
+              <a:buNone/>
+            </a:pPr>
+            <a:r>
+              <a:rPr lang="cs"/>
+              <a:t>Zvolená metoda</a:t>
+            </a:r>
+            <a:endParaRPr/>
+          </a:p>
+        </p:txBody>
+      </p:sp>
+      <p:sp>
+        <p:nvSpPr>
+          <p:cNvPr id="68" name="Google Shape;68;p15"/>
+          <p:cNvSpPr txBox="1">
+            <a:spLocks noGrp="1"/>
+          </p:cNvSpPr>
+          <p:nvPr>
+            <p:ph type="body" idx="1"/>
+          </p:nvPr>
+        </p:nvSpPr>
+        <p:spPr>
+          <a:xfrm>
+            <a:off x="311700" y="1152475"/>
+            <a:ext cx="8520600" cy="3416400"/>
+          </a:xfrm>
+          <a:prstGeom prst="rect">
+            <a:avLst/>
+          </a:prstGeom>
+        </p:spPr>
+        <p:txBody>
+          <a:bodyPr spcFirstLastPara="1" wrap="square" lIns="91425" tIns="91425" rIns="91425" bIns="91425" anchor="t" anchorCtr="0">
+            <a:normAutofit/>
+          </a:bodyPr>
+          <a:lstStyle/>
+          <a:p>
+            <a:pPr marL="0" lvl="0" indent="0" algn="l" rtl="0">
+              <a:spcBef>
+                <a:spcPts val="0"/>
+              </a:spcBef>
+              <a:spcAft>
+                <a:spcPts val="0"/>
+              </a:spcAft>
+              <a:buNone/>
+            </a:pPr>
+            <a:r>
+              <a:rPr lang="cs" dirty="0"/>
+              <a:t>Předpoklady:</a:t>
+            </a:r>
+            <a:endParaRPr dirty="0"/>
+          </a:p>
+          <a:p>
+            <a:pPr marL="457200" lvl="0" indent="-342900" algn="l" rtl="0">
+              <a:spcBef>
+                <a:spcPts val="1200"/>
+              </a:spcBef>
+              <a:spcAft>
+                <a:spcPts val="0"/>
+              </a:spcAft>
+              <a:buSzPts val="1800"/>
+              <a:buChar char="●"/>
+            </a:pPr>
+            <a:r>
+              <a:rPr lang="cs" dirty="0"/>
+              <a:t>Každý autor má unikátní jazykový styl.</a:t>
+            </a:r>
+            <a:endParaRPr dirty="0"/>
+          </a:p>
+          <a:p>
+            <a:pPr marL="457200" lvl="0" indent="-342900" algn="l" rtl="0">
+              <a:spcBef>
+                <a:spcPts val="0"/>
+              </a:spcBef>
+              <a:spcAft>
+                <a:spcPts val="0"/>
+              </a:spcAft>
+              <a:buSzPts val="1800"/>
+              <a:buChar char="●"/>
+            </a:pPr>
+            <a:r>
+              <a:rPr lang="cs" dirty="0"/>
+              <a:t>Styl zůstává stabilní i přes různé témata.</a:t>
+            </a:r>
+            <a:endParaRPr dirty="0"/>
+          </a:p>
+          <a:p>
+            <a:pPr marL="457200" lvl="0" indent="-342900" algn="l" rtl="0">
+              <a:spcBef>
+                <a:spcPts val="0"/>
+              </a:spcBef>
+              <a:spcAft>
+                <a:spcPts val="0"/>
+              </a:spcAft>
+              <a:buSzPts val="1800"/>
+              <a:buChar char="●"/>
+            </a:pPr>
+            <a:r>
+              <a:rPr lang="cs" dirty="0"/>
+              <a:t>Strojovým učením lze natrénovat </a:t>
+            </a:r>
+            <a:r>
+              <a:rPr lang="cs"/>
+              <a:t>tyto vzory.</a:t>
+            </a:r>
+            <a:endParaRPr dirty="0"/>
+          </a:p>
+          <a:p>
+            <a:pPr marL="0" lvl="0" indent="0" algn="l" rtl="0">
+              <a:spcBef>
+                <a:spcPts val="0"/>
+              </a:spcBef>
+              <a:spcAft>
+                <a:spcPts val="0"/>
+              </a:spcAft>
+              <a:buNone/>
+            </a:pPr>
+            <a:endParaRPr dirty="0"/>
+          </a:p>
+          <a:p>
+            <a:pPr marL="0" lvl="0" indent="0" algn="l" rtl="0">
+              <a:spcBef>
+                <a:spcPts val="0"/>
+              </a:spcBef>
+              <a:spcAft>
+                <a:spcPts val="0"/>
+              </a:spcAft>
+              <a:buNone/>
+            </a:pPr>
+            <a:r>
+              <a:rPr lang="cs" dirty="0"/>
+              <a:t>⇒ </a:t>
+            </a:r>
+            <a:r>
+              <a:rPr lang="cs" b="1" dirty="0"/>
+              <a:t>Analýza statistických charakteristik textu</a:t>
+            </a:r>
+            <a:r>
+              <a:rPr lang="cs" dirty="0"/>
+              <a:t> (jazykový styl, nikoli obsah)</a:t>
+            </a:r>
+            <a:endParaRPr dirty="0"/>
+          </a:p>
+        </p:txBody>
+      </p:sp>
+    </p:spTree>
+  </p:cSld>
+  <p:clrMapOvr>
+    <a:masterClrMapping/>
+  </p:clrMapOvr>
+</p:sld>
+</file>
+
+<file path=ppt/slides/slide4.xml><?xml version="1.0" encoding="utf-8"?>
+<p:sld xmlns:a="http://schemas.openxmlformats.org/drawingml/2006/main" xmlns:r="http://schemas.openxmlformats.org/officeDocument/2006/relationships" xmlns:p="http://schemas.openxmlformats.org/presentationml/2006/main">
+  <p:cSld>
+    <p:spTree>
+      <p:nvGrpSpPr>
+        <p:cNvPr id="1" name="Shape 72"/>
+        <p:cNvGrpSpPr/>
+        <p:nvPr/>
+      </p:nvGrpSpPr>
+      <p:grpSpPr>
+        <a:xfrm>
+          <a:off x="0" y="0"/>
+          <a:ext cx="0" cy="0"/>
+          <a:chOff x="0" y="0"/>
+          <a:chExt cx="0" cy="0"/>
+        </a:xfrm>
+      </p:grpSpPr>
+      <p:sp>
+        <p:nvSpPr>
+          <p:cNvPr id="73" name="Google Shape;73;p16"/>
+          <p:cNvSpPr txBox="1">
+            <a:spLocks noGrp="1"/>
+          </p:cNvSpPr>
+          <p:nvPr>
+            <p:ph type="title"/>
+          </p:nvPr>
+        </p:nvSpPr>
+        <p:spPr>
+          <a:xfrm>
+            <a:off x="971937" y="299234"/>
+            <a:ext cx="7753500" cy="572700"/>
+          </a:xfrm>
+          <a:prstGeom prst="rect">
+            <a:avLst/>
+          </a:prstGeom>
+        </p:spPr>
+        <p:txBody>
+          <a:bodyPr spcFirstLastPara="1" wrap="square" lIns="91425" tIns="91425" rIns="91425" bIns="91425" anchor="t" anchorCtr="0">
+            <a:normAutofit fontScale="90000"/>
+          </a:bodyPr>
+          <a:lstStyle/>
+          <a:p>
+            <a:pPr marL="0" lvl="0" indent="0" algn="l" rtl="0">
+              <a:spcBef>
+                <a:spcPts val="0"/>
+              </a:spcBef>
+              <a:spcAft>
+                <a:spcPts val="0"/>
+              </a:spcAft>
+              <a:buNone/>
+            </a:pPr>
+            <a:r>
+              <a:rPr lang="cs"/>
+              <a:t>Technické řešení: korpus</a:t>
+            </a:r>
+            <a:endParaRPr/>
+          </a:p>
+        </p:txBody>
+      </p:sp>
+      <p:sp>
+        <p:nvSpPr>
+          <p:cNvPr id="74" name="Google Shape;74;p16"/>
+          <p:cNvSpPr txBox="1">
+            <a:spLocks noGrp="1"/>
+          </p:cNvSpPr>
+          <p:nvPr>
+            <p:ph type="body" idx="1"/>
+          </p:nvPr>
+        </p:nvSpPr>
+        <p:spPr>
+          <a:xfrm>
+            <a:off x="311700" y="1152475"/>
+            <a:ext cx="8520600" cy="3416400"/>
+          </a:xfrm>
+          <a:prstGeom prst="rect">
+            <a:avLst/>
+          </a:prstGeom>
+        </p:spPr>
+        <p:txBody>
+          <a:bodyPr spcFirstLastPara="1" wrap="square" lIns="91425" tIns="91425" rIns="91425" bIns="91425" anchor="t" anchorCtr="0">
+            <a:normAutofit/>
+          </a:bodyPr>
+          <a:lstStyle/>
+          <a:p>
+            <a:pPr marL="457200" lvl="0" indent="-342900" algn="l" rtl="0">
+              <a:spcBef>
+                <a:spcPts val="0"/>
+              </a:spcBef>
+              <a:spcAft>
+                <a:spcPts val="0"/>
+              </a:spcAft>
+              <a:buSzPts val="1800"/>
+              <a:buChar char="●"/>
+            </a:pPr>
+            <a:r>
+              <a:rPr lang="cs" dirty="0"/>
+              <a:t>vybrané knihy: v 1. fázi 23 českých autorů, v 2. fázi 325 autorů,</a:t>
+            </a:r>
+            <a:br>
+              <a:rPr lang="cs" dirty="0"/>
+            </a:br>
+            <a:r>
+              <a:rPr lang="cs" dirty="0"/>
+              <a:t>počet se dále rozrůstá</a:t>
+            </a:r>
+            <a:endParaRPr dirty="0"/>
+          </a:p>
+          <a:p>
+            <a:pPr marL="457200" lvl="0" indent="-342900" algn="l" rtl="0">
+              <a:spcBef>
+                <a:spcPts val="0"/>
+              </a:spcBef>
+              <a:spcAft>
+                <a:spcPts val="0"/>
+              </a:spcAft>
+              <a:buSzPts val="1800"/>
+              <a:buChar char="●"/>
+            </a:pPr>
+            <a:r>
+              <a:rPr lang="cs" dirty="0"/>
+              <a:t>období: přelom 19. a 20. století</a:t>
+            </a:r>
+            <a:endParaRPr dirty="0"/>
+          </a:p>
+          <a:p>
+            <a:pPr marL="457200" lvl="0" indent="-342900" algn="l" rtl="0">
+              <a:spcBef>
+                <a:spcPts val="0"/>
+              </a:spcBef>
+              <a:spcAft>
+                <a:spcPts val="0"/>
+              </a:spcAft>
+              <a:buSzPts val="1800"/>
+              <a:buChar char="●"/>
+            </a:pPr>
+            <a:r>
+              <a:rPr lang="cs" dirty="0"/>
+              <a:t>zdroj: Národní digitální knihovna</a:t>
+            </a:r>
+            <a:endParaRPr dirty="0"/>
+          </a:p>
+          <a:p>
+            <a:pPr marL="457200" lvl="0" indent="-342900" algn="l" rtl="0">
+              <a:spcBef>
+                <a:spcPts val="0"/>
+              </a:spcBef>
+              <a:spcAft>
+                <a:spcPts val="0"/>
+              </a:spcAft>
+              <a:buSzPts val="1800"/>
+              <a:buChar char="●"/>
+            </a:pPr>
+            <a:r>
+              <a:rPr lang="cs" dirty="0"/>
+              <a:t>autoři: Čapek, Neruda, Jirásek, Heyduk atd.</a:t>
+            </a:r>
+            <a:endParaRPr dirty="0"/>
+          </a:p>
+        </p:txBody>
+      </p:sp>
+    </p:spTree>
+  </p:cSld>
+  <p:clrMapOvr>
+    <a:masterClrMapping/>
+  </p:clrMapOvr>
+</p:sld>
+</file>
+
+<file path=ppt/slides/slide5.xml><?xml version="1.0" encoding="utf-8"?>
+<p:sld xmlns:a="http://schemas.openxmlformats.org/drawingml/2006/main" xmlns:r="http://schemas.openxmlformats.org/officeDocument/2006/relationships" xmlns:p="http://schemas.openxmlformats.org/presentationml/2006/main">
+  <p:cSld>
+    <p:spTree>
+      <p:nvGrpSpPr>
+        <p:cNvPr id="1" name="Shape 78"/>
+        <p:cNvGrpSpPr/>
+        <p:nvPr/>
+      </p:nvGrpSpPr>
+      <p:grpSpPr>
+        <a:xfrm>
+          <a:off x="0" y="0"/>
+          <a:ext cx="0" cy="0"/>
+          <a:chOff x="0" y="0"/>
+          <a:chExt cx="0" cy="0"/>
+        </a:xfrm>
+      </p:grpSpPr>
+      <p:sp>
+        <p:nvSpPr>
+          <p:cNvPr id="79" name="Google Shape;79;p17"/>
+          <p:cNvSpPr txBox="1">
+            <a:spLocks noGrp="1"/>
+          </p:cNvSpPr>
+          <p:nvPr>
+            <p:ph type="title"/>
+          </p:nvPr>
+        </p:nvSpPr>
+        <p:spPr>
+          <a:xfrm>
+            <a:off x="971937" y="299234"/>
+            <a:ext cx="7753500" cy="572700"/>
+          </a:xfrm>
+          <a:prstGeom prst="rect">
+            <a:avLst/>
+          </a:prstGeom>
+        </p:spPr>
+        <p:txBody>
+          <a:bodyPr spcFirstLastPara="1" wrap="square" lIns="91425" tIns="91425" rIns="91425" bIns="91425" anchor="t" anchorCtr="0">
+            <a:normAutofit fontScale="90000"/>
+          </a:bodyPr>
+          <a:lstStyle/>
+          <a:p>
+            <a:pPr marL="0" lvl="0" indent="0" algn="l" rtl="0">
+              <a:spcBef>
+                <a:spcPts val="0"/>
+              </a:spcBef>
+              <a:spcAft>
+                <a:spcPts val="0"/>
+              </a:spcAft>
+              <a:buNone/>
+            </a:pPr>
+            <a:r>
+              <a:rPr lang="cs"/>
+              <a:t>Technické řešení: příprava dat</a:t>
+            </a:r>
+            <a:endParaRPr/>
+          </a:p>
+        </p:txBody>
+      </p:sp>
+      <p:sp>
+        <p:nvSpPr>
+          <p:cNvPr id="80" name="Google Shape;80;p17"/>
+          <p:cNvSpPr txBox="1">
+            <a:spLocks noGrp="1"/>
+          </p:cNvSpPr>
+          <p:nvPr>
+            <p:ph type="body" idx="1"/>
+          </p:nvPr>
+        </p:nvSpPr>
+        <p:spPr>
+          <a:xfrm>
+            <a:off x="311700" y="1152475"/>
+            <a:ext cx="8520600" cy="3416400"/>
+          </a:xfrm>
+          <a:prstGeom prst="rect">
+            <a:avLst/>
+          </a:prstGeom>
+        </p:spPr>
+        <p:txBody>
+          <a:bodyPr spcFirstLastPara="1" wrap="square" lIns="91425" tIns="91425" rIns="91425" bIns="91425" anchor="t" anchorCtr="0">
+            <a:normAutofit/>
+          </a:bodyPr>
+          <a:lstStyle/>
+          <a:p>
+            <a:pPr marL="457200" lvl="0" indent="-342900" algn="l" rtl="0">
+              <a:spcBef>
+                <a:spcPts val="0"/>
+              </a:spcBef>
+              <a:spcAft>
+                <a:spcPts val="0"/>
+              </a:spcAft>
+              <a:buSzPts val="1800"/>
+              <a:buChar char="●"/>
+            </a:pPr>
+            <a:r>
+              <a:rPr lang="cs"/>
+              <a:t>digitalizace: skenování a OCR vybraných knih</a:t>
+            </a:r>
+            <a:endParaRPr/>
+          </a:p>
+          <a:p>
+            <a:pPr marL="457200" lvl="0" indent="-342900" algn="l" rtl="0">
+              <a:spcBef>
+                <a:spcPts val="0"/>
+              </a:spcBef>
+              <a:spcAft>
+                <a:spcPts val="0"/>
+              </a:spcAft>
+              <a:buSzPts val="1800"/>
+              <a:buChar char="●"/>
+            </a:pPr>
+            <a:r>
+              <a:rPr lang="cs"/>
+              <a:t>čištění autorských textů od jiných částí knih: odstranění poznámek, obsahu, editorských poznámek</a:t>
+            </a:r>
+            <a:endParaRPr/>
+          </a:p>
+          <a:p>
+            <a:pPr marL="457200" lvl="0" indent="-342900" algn="l" rtl="0">
+              <a:spcBef>
+                <a:spcPts val="0"/>
+              </a:spcBef>
+              <a:spcAft>
+                <a:spcPts val="0"/>
+              </a:spcAft>
+              <a:buSzPts val="1800"/>
+              <a:buChar char="●"/>
+            </a:pPr>
+            <a:r>
+              <a:rPr lang="cs"/>
+              <a:t>normalizace: jednotné kódování UTF-8</a:t>
+            </a:r>
+            <a:endParaRPr/>
+          </a:p>
+          <a:p>
+            <a:pPr marL="457200" lvl="0" indent="-342900" algn="l" rtl="0">
+              <a:spcBef>
+                <a:spcPts val="0"/>
+              </a:spcBef>
+              <a:spcAft>
+                <a:spcPts val="0"/>
+              </a:spcAft>
+              <a:buSzPts val="1800"/>
+              <a:buChar char="●"/>
+            </a:pPr>
+            <a:r>
+              <a:rPr lang="cs"/>
+              <a:t>segmentace: rozdělení na segmenty po 1000, 500, 200 a 100 slovech</a:t>
+            </a:r>
+            <a:endParaRPr/>
+          </a:p>
+        </p:txBody>
+      </p:sp>
+    </p:spTree>
+  </p:cSld>
+  <p:clrMapOvr>
+    <a:masterClrMapping/>
+  </p:clrMapOvr>
+</p:sld>
+</file>
+
+<file path=ppt/slides/slide6.xml><?xml version="1.0" encoding="utf-8"?>
+<p:sld xmlns:a="http://schemas.openxmlformats.org/drawingml/2006/main" xmlns:r="http://schemas.openxmlformats.org/officeDocument/2006/relationships" xmlns:p="http://schemas.openxmlformats.org/presentationml/2006/main">
+  <p:cSld>
+    <p:spTree>
+      <p:nvGrpSpPr>
+        <p:cNvPr id="1" name="Shape 84"/>
+        <p:cNvGrpSpPr/>
+        <p:nvPr/>
+      </p:nvGrpSpPr>
+      <p:grpSpPr>
+        <a:xfrm>
+          <a:off x="0" y="0"/>
+          <a:ext cx="0" cy="0"/>
+          <a:chOff x="0" y="0"/>
+          <a:chExt cx="0" cy="0"/>
+        </a:xfrm>
+      </p:grpSpPr>
+      <p:sp>
+        <p:nvSpPr>
+          <p:cNvPr id="85" name="Google Shape;85;p18"/>
+          <p:cNvSpPr txBox="1">
+            <a:spLocks noGrp="1"/>
+          </p:cNvSpPr>
+          <p:nvPr>
+            <p:ph type="title"/>
+          </p:nvPr>
+        </p:nvSpPr>
+        <p:spPr>
+          <a:xfrm>
+            <a:off x="971937" y="299234"/>
+            <a:ext cx="7753500" cy="572700"/>
+          </a:xfrm>
+          <a:prstGeom prst="rect">
+            <a:avLst/>
+          </a:prstGeom>
+        </p:spPr>
+        <p:txBody>
+          <a:bodyPr spcFirstLastPara="1" wrap="square" lIns="91425" tIns="91425" rIns="91425" bIns="91425" anchor="t" anchorCtr="0">
+            <a:normAutofit fontScale="90000"/>
+          </a:bodyPr>
+          <a:lstStyle/>
+          <a:p>
+            <a:pPr marL="0" lvl="0" indent="0" algn="l" rtl="0">
+              <a:spcBef>
+                <a:spcPts val="0"/>
+              </a:spcBef>
+              <a:spcAft>
+                <a:spcPts val="0"/>
+              </a:spcAft>
+              <a:buNone/>
+            </a:pPr>
+            <a:r>
+              <a:rPr lang="cs"/>
+              <a:t>Technické řešení: zpracování</a:t>
+            </a:r>
+            <a:endParaRPr/>
+          </a:p>
+        </p:txBody>
+      </p:sp>
+      <p:sp>
+        <p:nvSpPr>
+          <p:cNvPr id="86" name="Google Shape;86;p18"/>
+          <p:cNvSpPr txBox="1">
+            <a:spLocks noGrp="1"/>
+          </p:cNvSpPr>
+          <p:nvPr>
+            <p:ph type="body" idx="1"/>
+          </p:nvPr>
+        </p:nvSpPr>
+        <p:spPr>
+          <a:xfrm>
+            <a:off x="311700" y="1152475"/>
+            <a:ext cx="8520600" cy="3833700"/>
+          </a:xfrm>
+          <a:prstGeom prst="rect">
+            <a:avLst/>
+          </a:prstGeom>
+        </p:spPr>
+        <p:txBody>
+          <a:bodyPr spcFirstLastPara="1" wrap="square" lIns="91425" tIns="91425" rIns="91425" bIns="91425" anchor="t" anchorCtr="0">
+            <a:normAutofit fontScale="92500"/>
+          </a:bodyPr>
+          <a:lstStyle/>
+          <a:p>
+            <a:pPr marL="0" lvl="0" indent="0" algn="l" rtl="0">
+              <a:spcBef>
+                <a:spcPts val="0"/>
+              </a:spcBef>
+              <a:spcAft>
+                <a:spcPts val="0"/>
+              </a:spcAft>
+              <a:buNone/>
+            </a:pPr>
+            <a:r>
+              <a:rPr lang="cs"/>
+              <a:t>Delexikace:</a:t>
+            </a:r>
+            <a:endParaRPr/>
+          </a:p>
+          <a:p>
+            <a:pPr marL="457200" lvl="0" indent="-342900" algn="l" rtl="0">
+              <a:spcBef>
+                <a:spcPts val="1200"/>
+              </a:spcBef>
+              <a:spcAft>
+                <a:spcPts val="0"/>
+              </a:spcAft>
+              <a:buSzPts val="1800"/>
+              <a:buChar char="●"/>
+            </a:pPr>
+            <a:r>
+              <a:rPr lang="cs"/>
+              <a:t>nahrazení významových slov (autosémantika – podstatná jména, přídavná jména, slovesa, příslovce) slovním druhem (POS tagy), např. „pes běžel rychle“ se převede na tagy: NOUN, VERB, ADV,</a:t>
+            </a:r>
+            <a:endParaRPr/>
+          </a:p>
+          <a:p>
+            <a:pPr marL="457200" lvl="0" indent="-342900" algn="l" rtl="0">
+              <a:spcBef>
+                <a:spcPts val="0"/>
+              </a:spcBef>
+              <a:spcAft>
+                <a:spcPts val="0"/>
+              </a:spcAft>
+              <a:buSzPts val="1800"/>
+              <a:buChar char="●"/>
+            </a:pPr>
+            <a:r>
+              <a:rPr lang="cs"/>
+              <a:t>ponechána funkční slova (synsémantika – předložky, spojky, zájmena, částice), např. „v“, „a“, „který“, „že“ zůstanou, protože funkční slova se používají velmi často a jejich frekvence je velmi typická pro styl autora,</a:t>
+            </a:r>
+            <a:endParaRPr/>
+          </a:p>
+          <a:p>
+            <a:pPr marL="457200" lvl="0" indent="-342900" algn="l" rtl="0">
+              <a:spcBef>
+                <a:spcPts val="0"/>
+              </a:spcBef>
+              <a:spcAft>
+                <a:spcPts val="0"/>
+              </a:spcAft>
+              <a:buSzPts val="1800"/>
+              <a:buChar char="●"/>
+            </a:pPr>
+            <a:r>
+              <a:rPr lang="cs"/>
+              <a:t>generování n-gramů: kombinace slov pro detekci vzorů</a:t>
+            </a:r>
+            <a:endParaRPr/>
+          </a:p>
+          <a:p>
+            <a:pPr marL="0" lvl="0" indent="0" algn="l" rtl="0">
+              <a:spcBef>
+                <a:spcPts val="1200"/>
+              </a:spcBef>
+              <a:spcAft>
+                <a:spcPts val="0"/>
+              </a:spcAft>
+              <a:buNone/>
+            </a:pPr>
+            <a:r>
+              <a:rPr lang="cs"/>
+              <a:t>Klasifikace textu pomocí metody Support Vector Machine (LinearSVC klasifikátor):</a:t>
+            </a:r>
+            <a:endParaRPr/>
+          </a:p>
+          <a:p>
+            <a:pPr marL="457200" lvl="0" indent="-342900" algn="l" rtl="0">
+              <a:spcBef>
+                <a:spcPts val="1200"/>
+              </a:spcBef>
+              <a:spcAft>
+                <a:spcPts val="0"/>
+              </a:spcAft>
+              <a:buSzPts val="1800"/>
+              <a:buChar char="●"/>
+            </a:pPr>
+            <a:r>
+              <a:rPr lang="cs"/>
+              <a:t>trénování: 60% textu daného titulu</a:t>
+            </a:r>
+            <a:endParaRPr/>
+          </a:p>
+          <a:p>
+            <a:pPr marL="457200" lvl="0" indent="-342900" algn="l" rtl="0">
+              <a:spcBef>
+                <a:spcPts val="0"/>
+              </a:spcBef>
+              <a:spcAft>
+                <a:spcPts val="0"/>
+              </a:spcAft>
+              <a:buSzPts val="1800"/>
+              <a:buChar char="●"/>
+            </a:pPr>
+            <a:r>
+              <a:rPr lang="cs"/>
+              <a:t>testování: zbylých 40% textu (20% ve 2 nezávislých sadách)</a:t>
+            </a:r>
+            <a:endParaRPr/>
+          </a:p>
+          <a:p>
+            <a:pPr marL="457200" lvl="0" indent="-342900" algn="l" rtl="0">
+              <a:spcBef>
+                <a:spcPts val="0"/>
+              </a:spcBef>
+              <a:spcAft>
+                <a:spcPts val="0"/>
+              </a:spcAft>
+              <a:buSzPts val="1800"/>
+              <a:buChar char="●"/>
+            </a:pPr>
+            <a:r>
+              <a:rPr lang="cs"/>
+              <a:t>vyhodnocení: % přesnost rozpoznání autorů</a:t>
+            </a:r>
+            <a:endParaRPr/>
+          </a:p>
+        </p:txBody>
+      </p:sp>
+    </p:spTree>
+  </p:cSld>
+  <p:clrMapOvr>
+    <a:masterClrMapping/>
+  </p:clrMapOvr>
+</p:sld>
+</file>
+
+<file path=ppt/slides/slide7.xml><?xml version="1.0" encoding="utf-8"?>
+<p:sld xmlns:a="http://schemas.openxmlformats.org/drawingml/2006/main" xmlns:r="http://schemas.openxmlformats.org/officeDocument/2006/relationships" xmlns:p="http://schemas.openxmlformats.org/presentationml/2006/main">
+  <p:cSld>
+    <p:spTree>
+      <p:nvGrpSpPr>
+        <p:cNvPr id="1" name="Shape 90"/>
+        <p:cNvGrpSpPr/>
+        <p:nvPr/>
+      </p:nvGrpSpPr>
+      <p:grpSpPr>
+        <a:xfrm>
+          <a:off x="0" y="0"/>
+          <a:ext cx="0" cy="0"/>
+          <a:chOff x="0" y="0"/>
+          <a:chExt cx="0" cy="0"/>
+        </a:xfrm>
+      </p:grpSpPr>
+      <p:sp>
+        <p:nvSpPr>
+          <p:cNvPr id="91" name="Google Shape;91;p19"/>
+          <p:cNvSpPr txBox="1">
+            <a:spLocks noGrp="1"/>
+          </p:cNvSpPr>
+          <p:nvPr>
+            <p:ph type="title"/>
+          </p:nvPr>
+        </p:nvSpPr>
+        <p:spPr>
+          <a:xfrm>
+            <a:off x="971937" y="299234"/>
+            <a:ext cx="7753500" cy="572700"/>
+          </a:xfrm>
+          <a:prstGeom prst="rect">
+            <a:avLst/>
+          </a:prstGeom>
+        </p:spPr>
+        <p:txBody>
+          <a:bodyPr spcFirstLastPara="1" wrap="square" lIns="91425" tIns="91425" rIns="91425" bIns="91425" anchor="t" anchorCtr="0">
+            <a:normAutofit fontScale="90000"/>
+          </a:bodyPr>
+          <a:lstStyle/>
+          <a:p>
+            <a:pPr marL="0" lvl="0" indent="0" algn="l" rtl="0">
+              <a:spcBef>
+                <a:spcPts val="0"/>
+              </a:spcBef>
+              <a:spcAft>
+                <a:spcPts val="0"/>
+              </a:spcAft>
+              <a:buNone/>
+            </a:pPr>
+            <a:r>
+              <a:rPr lang="cs"/>
+              <a:t>Výsledky a zjištění</a:t>
+            </a:r>
+            <a:endParaRPr/>
+          </a:p>
+        </p:txBody>
+      </p:sp>
+      <p:sp>
+        <p:nvSpPr>
+          <p:cNvPr id="92" name="Google Shape;92;p19"/>
+          <p:cNvSpPr txBox="1">
+            <a:spLocks noGrp="1"/>
+          </p:cNvSpPr>
+          <p:nvPr>
+            <p:ph type="body" idx="1"/>
+          </p:nvPr>
+        </p:nvSpPr>
+        <p:spPr>
+          <a:xfrm>
+            <a:off x="311700" y="1152475"/>
+            <a:ext cx="8520600" cy="3416400"/>
+          </a:xfrm>
+          <a:prstGeom prst="rect">
+            <a:avLst/>
+          </a:prstGeom>
+        </p:spPr>
+        <p:txBody>
+          <a:bodyPr spcFirstLastPara="1" wrap="square" lIns="91425" tIns="91425" rIns="91425" bIns="91425" anchor="t" anchorCtr="0">
+            <a:normAutofit/>
+          </a:bodyPr>
+          <a:lstStyle/>
+          <a:p>
+            <a:pPr marL="457200" lvl="0" indent="-342900" algn="l" rtl="0">
+              <a:spcBef>
+                <a:spcPts val="0"/>
+              </a:spcBef>
+              <a:spcAft>
+                <a:spcPts val="0"/>
+              </a:spcAft>
+              <a:buSzPts val="1800"/>
+              <a:buChar char="●"/>
+            </a:pPr>
+            <a:r>
+              <a:rPr lang="cs"/>
+              <a:t>přesnost je dána délkou textového originálu</a:t>
+            </a:r>
+            <a:endParaRPr/>
+          </a:p>
+          <a:p>
+            <a:pPr marL="457200" lvl="0" indent="-342900" algn="l" rtl="0">
+              <a:spcBef>
+                <a:spcPts val="0"/>
+              </a:spcBef>
+              <a:spcAft>
+                <a:spcPts val="0"/>
+              </a:spcAft>
+              <a:buSzPts val="1800"/>
+              <a:buChar char="●"/>
+            </a:pPr>
+            <a:r>
+              <a:rPr lang="cs"/>
+              <a:t>při 1000 slovech dosahuje přesnost 96% u 23 autorů, 82% u 325 autorů</a:t>
+            </a:r>
+            <a:endParaRPr/>
+          </a:p>
+          <a:p>
+            <a:pPr marL="457200" lvl="0" indent="-342900" algn="l" rtl="0">
+              <a:spcBef>
+                <a:spcPts val="0"/>
+              </a:spcBef>
+              <a:spcAft>
+                <a:spcPts val="0"/>
+              </a:spcAft>
+              <a:buSzPts val="1800"/>
+              <a:buChar char="●"/>
+            </a:pPr>
+            <a:r>
+              <a:rPr lang="cs"/>
+              <a:t>autoři s konzistentním stylem jsou lépe rozpoznatelní</a:t>
+            </a:r>
+            <a:endParaRPr/>
+          </a:p>
+          <a:p>
+            <a:pPr marL="457200" lvl="0" indent="-342900" algn="l" rtl="0">
+              <a:spcBef>
+                <a:spcPts val="0"/>
+              </a:spcBef>
+              <a:spcAft>
+                <a:spcPts val="0"/>
+              </a:spcAft>
+              <a:buSzPts val="1800"/>
+              <a:buChar char="●"/>
+            </a:pPr>
+            <a:r>
+              <a:rPr lang="cs"/>
+              <a:t>u kratších textů s 50 slovy klesá přesnost na 42%</a:t>
+            </a:r>
+            <a:endParaRPr/>
+          </a:p>
+          <a:p>
+            <a:pPr marL="0" lvl="0" indent="0" algn="l" rtl="0">
+              <a:spcBef>
+                <a:spcPts val="1200"/>
+              </a:spcBef>
+              <a:spcAft>
+                <a:spcPts val="1200"/>
+              </a:spcAft>
+              <a:buNone/>
+            </a:pPr>
+            <a:r>
+              <a:rPr lang="cs"/>
+              <a:t>Někteří autoři mají značné rozdíly mezi jednotlivými díly, tj. mají nízkou konzistenci stylu ⇒ ztížené určování autorství </a:t>
+            </a:r>
+            <a:endParaRPr/>
+          </a:p>
+        </p:txBody>
+      </p:sp>
+    </p:spTree>
+  </p:cSld>
+  <p:clrMapOvr>
+    <a:masterClrMapping/>
+  </p:clrMapOvr>
+</p:sld>
+</file>
+
+<file path=ppt/slides/slide8.xml><?xml version="1.0" encoding="utf-8"?>
+<p:sld xmlns:a="http://schemas.openxmlformats.org/drawingml/2006/main" xmlns:r="http://schemas.openxmlformats.org/officeDocument/2006/relationships" xmlns:p="http://schemas.openxmlformats.org/presentationml/2006/main">
+  <p:cSld>
+    <p:spTree>
+      <p:nvGrpSpPr>
+        <p:cNvPr id="1" name=""/>
+        <p:cNvGrpSpPr/>
+        <p:nvPr/>
+      </p:nvGrpSpPr>
+      <p:grpSpPr>
+        <a:xfrm>
+          <a:off x="0" y="0"/>
+          <a:ext cx="0" cy="0"/>
+          <a:chOff x="0" y="0"/>
+          <a:chExt cx="0" cy="0"/>
+        </a:xfrm>
+      </p:grpSpPr>
+      <p:sp>
+        <p:nvSpPr>
+          <p:cNvPr id="2" name="Nadpis 1">
+            <a:extLst>
+              <a:ext uri="{FF2B5EF4-FFF2-40B4-BE49-F238E27FC236}">
+                <a16:creationId xmlns:a16="http://schemas.microsoft.com/office/drawing/2014/main" id="{3575AFA9-08EE-508A-BB47-C6E40B4AC14E}"/>
+              </a:ext>
+            </a:extLst>
+          </p:cNvPr>
+          <p:cNvSpPr>
+            <a:spLocks noGrp="1"/>
+          </p:cNvSpPr>
+          <p:nvPr>
+            <p:ph type="title"/>
+          </p:nvPr>
+        </p:nvSpPr>
+        <p:spPr/>
+        <p:txBody>
+          <a:bodyPr>
+            <a:normAutofit fontScale="90000"/>
+          </a:bodyPr>
+          <a:lstStyle/>
+          <a:p>
+            <a:r>
+              <a:rPr lang="cs-CZ" dirty="0"/>
+              <a:t>Výsledky testování pro jednotlivé autory</a:t>
+            </a:r>
+          </a:p>
+        </p:txBody>
+      </p:sp>
+      <p:pic>
+        <p:nvPicPr>
+          <p:cNvPr id="5" name="Obrázek 4">
+            <a:extLst>
+              <a:ext uri="{FF2B5EF4-FFF2-40B4-BE49-F238E27FC236}">
+                <a16:creationId xmlns:a16="http://schemas.microsoft.com/office/drawing/2014/main" id="{9759028F-22A3-8AEF-B282-CCEB1CD8F049}"/>
+              </a:ext>
+            </a:extLst>
+          </p:cNvPr>
+          <p:cNvPicPr>
+            <a:picLocks noChangeAspect="1"/>
+          </p:cNvPicPr>
+          <p:nvPr/>
+        </p:nvPicPr>
+        <p:blipFill>
+          <a:blip r:embed="rId2"/>
+          <a:stretch>
+            <a:fillRect/>
+          </a:stretch>
+        </p:blipFill>
+        <p:spPr>
+          <a:xfrm>
+            <a:off x="685800" y="930057"/>
+            <a:ext cx="7772400" cy="4134580"/>
+          </a:xfrm>
+          <a:prstGeom prst="rect">
+            <a:avLst/>
+          </a:prstGeom>
+        </p:spPr>
+      </p:pic>
+    </p:spTree>
+    <p:extLst>
+      <p:ext uri="{BB962C8B-B14F-4D97-AF65-F5344CB8AC3E}">
+        <p14:creationId xmlns:p14="http://schemas.microsoft.com/office/powerpoint/2010/main" val="4282677840"/>
+      </p:ext>
+    </p:extLst>
+  </p:cSld>
+  <p:clrMapOvr>
+    <a:masterClrMapping/>
+  </p:clrMapOvr>
+</p:sld>
+</file>
+
+<file path=ppt/slides/slide9.xml><?xml version="1.0" encoding="utf-8"?>
+<p:sld xmlns:a="http://schemas.openxmlformats.org/drawingml/2006/main" xmlns:r="http://schemas.openxmlformats.org/officeDocument/2006/relationships" xmlns:p="http://schemas.openxmlformats.org/presentationml/2006/main">
+  <p:cSld>
+    <p:spTree>
+      <p:nvGrpSpPr>
+        <p:cNvPr id="1" name="Shape 96"/>
+        <p:cNvGrpSpPr/>
+        <p:nvPr/>
+      </p:nvGrpSpPr>
+      <p:grpSpPr>
+        <a:xfrm>
+          <a:off x="0" y="0"/>
+          <a:ext cx="0" cy="0"/>
+          <a:chOff x="0" y="0"/>
+          <a:chExt cx="0" cy="0"/>
+        </a:xfrm>
+      </p:grpSpPr>
+      <p:sp>
+        <p:nvSpPr>
+          <p:cNvPr id="97" name="Google Shape;97;p20"/>
+          <p:cNvSpPr txBox="1">
+            <a:spLocks noGrp="1"/>
+          </p:cNvSpPr>
+          <p:nvPr>
+            <p:ph type="title"/>
+          </p:nvPr>
+        </p:nvSpPr>
+        <p:spPr>
+          <a:xfrm>
+            <a:off x="971937" y="299234"/>
+            <a:ext cx="7753500" cy="572700"/>
+          </a:xfrm>
+          <a:prstGeom prst="rect">
+            <a:avLst/>
+          </a:prstGeom>
+        </p:spPr>
+        <p:txBody>
+          <a:bodyPr spcFirstLastPara="1" wrap="square" lIns="91425" tIns="91425" rIns="91425" bIns="91425" anchor="t" anchorCtr="0">
+            <a:normAutofit fontScale="90000"/>
+          </a:bodyPr>
+          <a:lstStyle/>
+          <a:p>
+            <a:pPr marL="0" lvl="0" indent="0" algn="l" rtl="0">
+              <a:spcBef>
+                <a:spcPts val="0"/>
+              </a:spcBef>
+              <a:spcAft>
+                <a:spcPts val="0"/>
+              </a:spcAft>
+              <a:buNone/>
+            </a:pPr>
+            <a:r>
+              <a:rPr lang="cs"/>
+              <a:t>Výsledky testování na sadách train, test a devel</a:t>
+            </a:r>
+            <a:endParaRPr/>
+          </a:p>
+        </p:txBody>
+      </p:sp>
+      <p:pic>
+        <p:nvPicPr>
+          <p:cNvPr id="98" name="Google Shape;98;p20" title="Snímek obrazovky 2025-11-26 v 20.41.22.png"/>
+          <p:cNvPicPr preferRelativeResize="0"/>
+          <p:nvPr/>
+        </p:nvPicPr>
+        <p:blipFill>
+          <a:blip r:embed="rId3">
+            <a:alphaModFix/>
+          </a:blip>
+          <a:stretch>
+            <a:fillRect/>
+          </a:stretch>
+        </p:blipFill>
+        <p:spPr>
+          <a:xfrm>
+            <a:off x="1457425" y="975734"/>
+            <a:ext cx="6229158" cy="3966767"/>
           </a:xfrm>
           <a:prstGeom prst="rect">
             <a:avLst/>
